--- a/P10_PPT.pptx
+++ b/P10_PPT.pptx
@@ -5,7 +5,7 @@
     <p:sldMasterId id="2147483712" r:id="rId1"/>
   </p:sldMasterIdLst>
   <p:notesMasterIdLst>
-    <p:notesMasterId r:id="rId27"/>
+    <p:notesMasterId r:id="rId21"/>
   </p:notesMasterIdLst>
   <p:sldIdLst>
     <p:sldId id="256" r:id="rId2"/>
@@ -22,17 +22,11 @@
     <p:sldId id="390" r:id="rId13"/>
     <p:sldId id="364" r:id="rId14"/>
     <p:sldId id="389" r:id="rId15"/>
-    <p:sldId id="383" r:id="rId16"/>
-    <p:sldId id="384" r:id="rId17"/>
-    <p:sldId id="385" r:id="rId18"/>
-    <p:sldId id="378" r:id="rId19"/>
-    <p:sldId id="386" r:id="rId20"/>
-    <p:sldId id="382" r:id="rId21"/>
-    <p:sldId id="365" r:id="rId22"/>
-    <p:sldId id="363" r:id="rId23"/>
-    <p:sldId id="379" r:id="rId24"/>
-    <p:sldId id="377" r:id="rId25"/>
-    <p:sldId id="290" r:id="rId26"/>
+    <p:sldId id="382" r:id="rId16"/>
+    <p:sldId id="391" r:id="rId17"/>
+    <p:sldId id="392" r:id="rId18"/>
+    <p:sldId id="377" r:id="rId19"/>
+    <p:sldId id="290" r:id="rId20"/>
   </p:sldIdLst>
   <p:sldSz cx="12192000" cy="6858000"/>
   <p:notesSz cx="6858000" cy="9144000"/>
@@ -221,7 +215,7 @@
           <a:p>
             <a:fld id="{BD6D6A6A-BAB6-484B-9304-24E0759B6528}" type="datetimeFigureOut">
               <a:rPr lang="fr-FR" smtClean="0"/>
-              <a:t>04/02/2026</a:t>
+              <a:t>06/02/2026</a:t>
             </a:fld>
             <a:endParaRPr lang="fr-FR"/>
           </a:p>
@@ -733,7 +727,7 @@
           <a:p>
             <a:fld id="{ED291B17-9318-49DB-B28B-6E5994AE9581}" type="datetime1">
               <a:rPr lang="en-US" smtClean="0"/>
-              <a:t>2/4/2026</a:t>
+              <a:t>2/6/2026</a:t>
             </a:fld>
             <a:endParaRPr lang="en-US" dirty="0"/>
           </a:p>
@@ -936,7 +930,7 @@
           <a:p>
             <a:fld id="{2CED4963-E985-44C4-B8C4-FDD613B7C2F8}" type="datetime1">
               <a:rPr lang="en-US" smtClean="0"/>
-              <a:t>2/4/2026</a:t>
+              <a:t>2/6/2026</a:t>
             </a:fld>
             <a:endParaRPr lang="en-US" dirty="0"/>
           </a:p>
@@ -1298,7 +1292,7 @@
           <a:p>
             <a:fld id="{ED291B17-9318-49DB-B28B-6E5994AE9581}" type="datetime1">
               <a:rPr lang="en-US" smtClean="0"/>
-              <a:t>2/4/2026</a:t>
+              <a:t>2/6/2026</a:t>
             </a:fld>
             <a:endParaRPr lang="en-US" dirty="0"/>
           </a:p>
@@ -1496,7 +1490,7 @@
           <a:p>
             <a:fld id="{78DD82B9-B8EE-4375-B6FF-88FA6ABB15D9}" type="datetime1">
               <a:rPr lang="en-US" smtClean="0"/>
-              <a:t>2/4/2026</a:t>
+              <a:t>2/6/2026</a:t>
             </a:fld>
             <a:endParaRPr lang="en-US" dirty="0"/>
           </a:p>
@@ -1808,7 +1802,7 @@
           <a:p>
             <a:fld id="{B2497495-0637-405E-AE64-5CC7506D51F5}" type="datetime1">
               <a:rPr lang="en-US" smtClean="0"/>
-              <a:t>2/4/2026</a:t>
+              <a:t>2/6/2026</a:t>
             </a:fld>
             <a:endParaRPr lang="en-US" dirty="0"/>
           </a:p>
@@ -2061,7 +2055,7 @@
           <a:p>
             <a:fld id="{7BFFD690-9426-415D-8B65-26881E07B2D4}" type="datetime1">
               <a:rPr lang="en-US" smtClean="0"/>
-              <a:t>2/4/2026</a:t>
+              <a:t>2/6/2026</a:t>
             </a:fld>
             <a:endParaRPr lang="en-US" dirty="0"/>
           </a:p>
@@ -2483,7 +2477,7 @@
           <a:p>
             <a:fld id="{04C4989A-474C-40DE-95B9-011C28B71673}" type="datetime1">
               <a:rPr lang="en-US" smtClean="0"/>
-              <a:t>2/4/2026</a:t>
+              <a:t>2/6/2026</a:t>
             </a:fld>
             <a:endParaRPr lang="en-US" dirty="0"/>
           </a:p>
@@ -2606,7 +2600,7 @@
           <a:p>
             <a:fld id="{5DB4ED54-5B5E-4A04-93D3-5772E3CE3818}" type="datetime1">
               <a:rPr lang="en-US" smtClean="0"/>
-              <a:t>2/4/2026</a:t>
+              <a:t>2/6/2026</a:t>
             </a:fld>
             <a:endParaRPr lang="en-US" dirty="0"/>
           </a:p>
@@ -2701,7 +2695,7 @@
           <a:p>
             <a:fld id="{4EDE50D6-574B-40AF-946F-D52A04ADE379}" type="datetime1">
               <a:rPr lang="en-US" smtClean="0"/>
-              <a:t>2/4/2026</a:t>
+              <a:t>2/6/2026</a:t>
             </a:fld>
             <a:endParaRPr lang="en-US" dirty="0"/>
           </a:p>
@@ -3078,7 +3072,7 @@
           <a:p>
             <a:fld id="{D82884F1-FFEA-405F-9602-3DCA865EDA4E}" type="datetime1">
               <a:rPr lang="en-US" smtClean="0"/>
-              <a:t>2/4/2026</a:t>
+              <a:t>2/6/2026</a:t>
             </a:fld>
             <a:endParaRPr lang="en-US" dirty="0"/>
           </a:p>
@@ -3370,7 +3364,7 @@
           <a:p>
             <a:fld id="{7E18DB4A-8810-4A10-AD5C-D5E2C667F5B3}" type="datetime1">
               <a:rPr lang="en-US" smtClean="0"/>
-              <a:t>2/4/2026</a:t>
+              <a:t>2/6/2026</a:t>
             </a:fld>
             <a:endParaRPr lang="en-US" dirty="0"/>
           </a:p>
@@ -3585,7 +3579,7 @@
           <a:p>
             <a:fld id="{ED291B17-9318-49DB-B28B-6E5994AE9581}" type="datetime1">
               <a:rPr lang="en-US" smtClean="0"/>
-              <a:t>2/4/2026</a:t>
+              <a:t>2/6/2026</a:t>
             </a:fld>
             <a:endParaRPr lang="en-US" dirty="0"/>
           </a:p>
@@ -5767,7 +5761,7 @@
     <p:bg>
       <p:bgPr>
         <a:solidFill>
-          <a:schemeClr val="accent1"/>
+          <a:schemeClr val="tx2"/>
         </a:solidFill>
         <a:effectLst/>
       </p:bgPr>
@@ -5777,7 +5771,7 @@
         <p:cNvPr id="1" name="">
           <a:extLst>
             <a:ext uri="{FF2B5EF4-FFF2-40B4-BE49-F238E27FC236}">
-              <a16:creationId xmlns:a16="http://schemas.microsoft.com/office/drawing/2014/main" id="{3C7AEE67-DC4E-2509-DF4F-41A204447527}"/>
+              <a16:creationId xmlns:a16="http://schemas.microsoft.com/office/drawing/2014/main" id="{F2D012D0-E35B-F977-9B67-D220C5D1E3D7}"/>
             </a:ext>
           </a:extLst>
         </p:cNvPr>
@@ -5797,7 +5791,7 @@
           <p:cNvPr id="2" name="Titre 1">
             <a:extLst>
               <a:ext uri="{FF2B5EF4-FFF2-40B4-BE49-F238E27FC236}">
-                <a16:creationId xmlns:a16="http://schemas.microsoft.com/office/drawing/2014/main" id="{0C1312C8-D2CE-F0DC-9134-29E37F8DF6F4}"/>
+                <a16:creationId xmlns:a16="http://schemas.microsoft.com/office/drawing/2014/main" id="{2154440F-6728-3804-008F-01B6F5027723}"/>
               </a:ext>
             </a:extLst>
           </p:cNvPr>
@@ -5810,8 +5804,8 @@
         </p:nvSpPr>
         <p:spPr>
           <a:xfrm>
-            <a:off x="4243761" y="-58006"/>
-            <a:ext cx="3585789" cy="778698"/>
+            <a:off x="4099944" y="-158127"/>
+            <a:ext cx="3992112" cy="778698"/>
           </a:xfrm>
         </p:spPr>
         <p:txBody>
@@ -5823,20 +5817,20 @@
             <a:r>
               <a:rPr lang="fr-FR" sz="4000" dirty="0">
                 <a:solidFill>
-                  <a:srgbClr val="FFFF00"/>
+                  <a:schemeClr val="accent3"/>
                 </a:solidFill>
               </a:rPr>
-              <a:t>Efficientnetv2</a:t>
+              <a:t>AZURE FUNCTION</a:t>
             </a:r>
           </a:p>
         </p:txBody>
       </p:sp>
       <p:pic>
         <p:nvPicPr>
-          <p:cNvPr id="4" name="Image 3" descr="Une image contenant texte, capture d’écran, Police&#10;&#10;Le contenu généré par l’IA peut être incorrect.">
+          <p:cNvPr id="5" name="Image 4" descr="Une image contenant texte, capture d’écran, Police, logiciel&#10;&#10;Le contenu généré par l’IA peut être incorrect.">
             <a:extLst>
               <a:ext uri="{FF2B5EF4-FFF2-40B4-BE49-F238E27FC236}">
-                <a16:creationId xmlns:a16="http://schemas.microsoft.com/office/drawing/2014/main" id="{21962FC5-3C43-10D6-8EAF-A7B4C4ECA60B}"/>
+                <a16:creationId xmlns:a16="http://schemas.microsoft.com/office/drawing/2014/main" id="{5EFC1DB0-F87C-7D2B-84A2-3E785CCDD076}"/>
               </a:ext>
             </a:extLst>
           </p:cNvPr>
@@ -5859,108 +5853,18 @@
         </p:blipFill>
         <p:spPr>
           <a:xfrm>
-            <a:off x="1530925" y="720692"/>
-            <a:ext cx="9130145" cy="4114372"/>
+            <a:off x="2047310" y="948117"/>
+            <a:ext cx="8097380" cy="5306165"/>
           </a:xfrm>
           <a:prstGeom prst="rect">
             <a:avLst/>
           </a:prstGeom>
         </p:spPr>
       </p:pic>
-      <p:sp>
-        <p:nvSpPr>
-          <p:cNvPr id="5" name="ZoneTexte 4">
-            <a:extLst>
-              <a:ext uri="{FF2B5EF4-FFF2-40B4-BE49-F238E27FC236}">
-                <a16:creationId xmlns:a16="http://schemas.microsoft.com/office/drawing/2014/main" id="{7A13404C-1936-6FE6-B538-8A93D300B4FE}"/>
-              </a:ext>
-            </a:extLst>
-          </p:cNvPr>
-          <p:cNvSpPr txBox="1"/>
-          <p:nvPr/>
-        </p:nvSpPr>
-        <p:spPr>
-          <a:xfrm>
-            <a:off x="2512684" y="5234674"/>
-            <a:ext cx="7166625" cy="1384995"/>
-          </a:xfrm>
-          <a:prstGeom prst="rect">
-            <a:avLst/>
-          </a:prstGeom>
-          <a:gradFill flip="none" rotWithShape="1">
-            <a:gsLst>
-              <a:gs pos="0">
-                <a:schemeClr val="dk1">
-                  <a:lumMod val="67000"/>
-                </a:schemeClr>
-              </a:gs>
-              <a:gs pos="48000">
-                <a:schemeClr val="dk1">
-                  <a:lumMod val="97000"/>
-                  <a:lumOff val="3000"/>
-                </a:schemeClr>
-              </a:gs>
-              <a:gs pos="100000">
-                <a:schemeClr val="dk1">
-                  <a:lumMod val="60000"/>
-                  <a:lumOff val="40000"/>
-                </a:schemeClr>
-              </a:gs>
-            </a:gsLst>
-            <a:lin ang="16200000" scaled="1"/>
-            <a:tileRect/>
-          </a:gradFill>
-          <a:ln>
-            <a:noFill/>
-          </a:ln>
-        </p:spPr>
-        <p:style>
-          <a:lnRef idx="0">
-            <a:scrgbClr r="0" g="0" b="0"/>
-          </a:lnRef>
-          <a:fillRef idx="0">
-            <a:scrgbClr r="0" g="0" b="0"/>
-          </a:fillRef>
-          <a:effectRef idx="0">
-            <a:scrgbClr r="0" g="0" b="0"/>
-          </a:effectRef>
-          <a:fontRef idx="minor">
-            <a:schemeClr val="lt1"/>
-          </a:fontRef>
-        </p:style>
-        <p:txBody>
-          <a:bodyPr wrap="square" rtlCol="0">
-            <a:spAutoFit/>
-          </a:bodyPr>
-          <a:lstStyle/>
-          <a:p>
-            <a:r>
-              <a:rPr lang="fr-FR" sz="1400" dirty="0"/>
-              <a:t>Le pipeline commence par un prétraitement visant à standardiser les images d’entrée et à garantir la stabilité de l’apprentissage. EfficientNetV2 est ensuite utilisé comme encodeur afin d’extraire des caractéristiques hiérarchiques sous forme de cartes multi-résolution, permettant de capter à la fois le contexte global et les détails fins. Les </a:t>
-            </a:r>
-            <a:r>
-              <a:rPr lang="fr-FR" sz="1400" i="1" dirty="0"/>
-              <a:t>skip connections</a:t>
-            </a:r>
-            <a:r>
-              <a:rPr lang="fr-FR" sz="1400" dirty="0"/>
-              <a:t> du </a:t>
-            </a:r>
-            <a:r>
-              <a:rPr lang="fr-FR" sz="1400" dirty="0" err="1"/>
-              <a:t>UNet</a:t>
-            </a:r>
-            <a:r>
-              <a:rPr lang="fr-FR" sz="1400" dirty="0"/>
-              <a:t> réinjectent ces informations vers le décodeur pour améliorer la précision spatiale, tandis que le gel du backbone permet de réduire le coût de calcul et de stabiliser la convergence du modèle.</a:t>
-            </a:r>
-          </a:p>
-        </p:txBody>
-      </p:sp>
     </p:spTree>
     <p:extLst>
       <p:ext uri="{BB962C8B-B14F-4D97-AF65-F5344CB8AC3E}">
-        <p14:creationId xmlns:p14="http://schemas.microsoft.com/office/powerpoint/2010/main" val="4081772953"/>
+        <p14:creationId xmlns:p14="http://schemas.microsoft.com/office/powerpoint/2010/main" val="3616014300"/>
       </p:ext>
     </p:extLst>
   </p:cSld>
@@ -5976,7 +5880,7 @@
     <p:bg>
       <p:bgPr>
         <a:solidFill>
-          <a:schemeClr val="accent1"/>
+          <a:schemeClr val="tx2"/>
         </a:solidFill>
         <a:effectLst/>
       </p:bgPr>
@@ -5986,7 +5890,7 @@
         <p:cNvPr id="1" name="">
           <a:extLst>
             <a:ext uri="{FF2B5EF4-FFF2-40B4-BE49-F238E27FC236}">
-              <a16:creationId xmlns:a16="http://schemas.microsoft.com/office/drawing/2014/main" id="{8E49BA89-9763-EADB-5594-1552952EBB41}"/>
+              <a16:creationId xmlns:a16="http://schemas.microsoft.com/office/drawing/2014/main" id="{FD2C930A-9C39-881F-839A-91D59F7F6624}"/>
             </a:ext>
           </a:extLst>
         </p:cNvPr>
@@ -6006,7 +5910,7 @@
           <p:cNvPr id="2" name="Titre 1">
             <a:extLst>
               <a:ext uri="{FF2B5EF4-FFF2-40B4-BE49-F238E27FC236}">
-                <a16:creationId xmlns:a16="http://schemas.microsoft.com/office/drawing/2014/main" id="{CB5CB8DF-44F2-107A-483D-6654747591D3}"/>
+                <a16:creationId xmlns:a16="http://schemas.microsoft.com/office/drawing/2014/main" id="{CE2992DB-622D-2AAB-9ADD-57C8010B3D3A}"/>
               </a:ext>
             </a:extLst>
           </p:cNvPr>
@@ -6019,8 +5923,8 @@
         </p:nvSpPr>
         <p:spPr>
           <a:xfrm>
-            <a:off x="4243761" y="-58006"/>
-            <a:ext cx="3585789" cy="778698"/>
+            <a:off x="4099944" y="-158127"/>
+            <a:ext cx="3992112" cy="778698"/>
           </a:xfrm>
         </p:spPr>
         <p:txBody>
@@ -6032,20 +5936,20 @@
             <a:r>
               <a:rPr lang="fr-FR" sz="4000" dirty="0">
                 <a:solidFill>
-                  <a:srgbClr val="FFFF00"/>
+                  <a:schemeClr val="accent3"/>
                 </a:solidFill>
               </a:rPr>
-              <a:t>Efficientnetv2</a:t>
+              <a:t>AZURE FUNCTION</a:t>
             </a:r>
           </a:p>
         </p:txBody>
       </p:sp>
       <p:pic>
         <p:nvPicPr>
-          <p:cNvPr id="6" name="Image 5" descr="Une image contenant texte, capture d’écran, Police&#10;&#10;Le contenu généré par l’IA peut être incorrect.">
+          <p:cNvPr id="4" name="Image 3" descr="Une image contenant texte, capture d’écran, logiciel, Police&#10;&#10;Le contenu généré par l’IA peut être incorrect.">
             <a:extLst>
               <a:ext uri="{FF2B5EF4-FFF2-40B4-BE49-F238E27FC236}">
-                <a16:creationId xmlns:a16="http://schemas.microsoft.com/office/drawing/2014/main" id="{4C5132C0-8D6F-448E-5B2D-28C3210D9BEF}"/>
+                <a16:creationId xmlns:a16="http://schemas.microsoft.com/office/drawing/2014/main" id="{7A4E533E-1082-DA08-F66E-2D703112CEFC}"/>
               </a:ext>
             </a:extLst>
           </p:cNvPr>
@@ -6068,116 +5972,18 @@
         </p:blipFill>
         <p:spPr>
           <a:xfrm>
-            <a:off x="322791" y="1108042"/>
-            <a:ext cx="11427725" cy="3227641"/>
+            <a:off x="1906039" y="941344"/>
+            <a:ext cx="8379922" cy="5347290"/>
           </a:xfrm>
           <a:prstGeom prst="rect">
             <a:avLst/>
           </a:prstGeom>
         </p:spPr>
       </p:pic>
-      <p:sp>
-        <p:nvSpPr>
-          <p:cNvPr id="7" name="ZoneTexte 6">
-            <a:extLst>
-              <a:ext uri="{FF2B5EF4-FFF2-40B4-BE49-F238E27FC236}">
-                <a16:creationId xmlns:a16="http://schemas.microsoft.com/office/drawing/2014/main" id="{E9FA40F6-14A3-4905-8FCE-12DD6FE6DEE1}"/>
-              </a:ext>
-            </a:extLst>
-          </p:cNvPr>
-          <p:cNvSpPr txBox="1"/>
-          <p:nvPr/>
-        </p:nvSpPr>
-        <p:spPr>
-          <a:xfrm>
-            <a:off x="2453342" y="5031474"/>
-            <a:ext cx="7166625" cy="954107"/>
-          </a:xfrm>
-          <a:prstGeom prst="rect">
-            <a:avLst/>
-          </a:prstGeom>
-          <a:gradFill flip="none" rotWithShape="1">
-            <a:gsLst>
-              <a:gs pos="0">
-                <a:schemeClr val="dk1">
-                  <a:lumMod val="67000"/>
-                </a:schemeClr>
-              </a:gs>
-              <a:gs pos="48000">
-                <a:schemeClr val="dk1">
-                  <a:lumMod val="97000"/>
-                  <a:lumOff val="3000"/>
-                </a:schemeClr>
-              </a:gs>
-              <a:gs pos="100000">
-                <a:schemeClr val="dk1">
-                  <a:lumMod val="60000"/>
-                  <a:lumOff val="40000"/>
-                </a:schemeClr>
-              </a:gs>
-            </a:gsLst>
-            <a:lin ang="16200000" scaled="1"/>
-            <a:tileRect/>
-          </a:gradFill>
-          <a:ln>
-            <a:noFill/>
-          </a:ln>
-        </p:spPr>
-        <p:style>
-          <a:lnRef idx="0">
-            <a:scrgbClr r="0" g="0" b="0"/>
-          </a:lnRef>
-          <a:fillRef idx="0">
-            <a:scrgbClr r="0" g="0" b="0"/>
-          </a:fillRef>
-          <a:effectRef idx="0">
-            <a:scrgbClr r="0" g="0" b="0"/>
-          </a:effectRef>
-          <a:fontRef idx="minor">
-            <a:schemeClr val="lt1"/>
-          </a:fontRef>
-        </p:style>
-        <p:txBody>
-          <a:bodyPr wrap="square" rtlCol="0">
-            <a:spAutoFit/>
-          </a:bodyPr>
-          <a:lstStyle/>
-          <a:p>
-            <a:r>
-              <a:rPr lang="fr-FR" sz="1400" dirty="0"/>
-              <a:t>Les performances sont évaluées à l’aide de métriques complémentaires. Le </a:t>
-            </a:r>
-            <a:r>
-              <a:rPr lang="fr-FR" sz="1400" dirty="0" err="1"/>
-              <a:t>Dice</a:t>
-            </a:r>
-            <a:r>
-              <a:rPr lang="fr-FR" sz="1400" dirty="0"/>
-              <a:t> mesure le recouvrement global, l’</a:t>
-            </a:r>
-            <a:r>
-              <a:rPr lang="fr-FR" sz="1400" dirty="0" err="1"/>
-              <a:t>IoU</a:t>
-            </a:r>
-            <a:r>
-              <a:rPr lang="fr-FR" sz="1400" dirty="0"/>
-              <a:t> fournit une évaluation plus exigeante des erreurs, et la pixel </a:t>
-            </a:r>
-            <a:r>
-              <a:rPr lang="fr-FR" sz="1400" dirty="0" err="1"/>
-              <a:t>accuracy</a:t>
-            </a:r>
-            <a:r>
-              <a:rPr lang="fr-FR" sz="1400" dirty="0"/>
-              <a:t> donne une vue générale souvent dominée par le fond. Leur combinaison dans un score synthétique permet de comparer efficacement les modèles dans le cadre de la preuve de concept.</a:t>
-            </a:r>
-          </a:p>
-        </p:txBody>
-      </p:sp>
     </p:spTree>
     <p:extLst>
       <p:ext uri="{BB962C8B-B14F-4D97-AF65-F5344CB8AC3E}">
-        <p14:creationId xmlns:p14="http://schemas.microsoft.com/office/powerpoint/2010/main" val="1222506726"/>
+        <p14:creationId xmlns:p14="http://schemas.microsoft.com/office/powerpoint/2010/main" val="2586280254"/>
       </p:ext>
     </p:extLst>
   </p:cSld>
@@ -6193,7 +5999,7 @@
     <p:bg>
       <p:bgPr>
         <a:solidFill>
-          <a:schemeClr val="accent1"/>
+          <a:schemeClr val="tx2"/>
         </a:solidFill>
         <a:effectLst/>
       </p:bgPr>
@@ -6203,7 +6009,7 @@
         <p:cNvPr id="1" name="">
           <a:extLst>
             <a:ext uri="{FF2B5EF4-FFF2-40B4-BE49-F238E27FC236}">
-              <a16:creationId xmlns:a16="http://schemas.microsoft.com/office/drawing/2014/main" id="{1A9F9E78-D001-E0C5-5FDA-BE07E3DF5516}"/>
+              <a16:creationId xmlns:a16="http://schemas.microsoft.com/office/drawing/2014/main" id="{B096E085-1F46-252D-B618-DE9BCAFA759A}"/>
             </a:ext>
           </a:extLst>
         </p:cNvPr>
@@ -6223,7 +6029,7 @@
           <p:cNvPr id="2" name="Titre 1">
             <a:extLst>
               <a:ext uri="{FF2B5EF4-FFF2-40B4-BE49-F238E27FC236}">
-                <a16:creationId xmlns:a16="http://schemas.microsoft.com/office/drawing/2014/main" id="{D9DF4B05-C8FE-5AE1-D14A-6E22BE6FB875}"/>
+                <a16:creationId xmlns:a16="http://schemas.microsoft.com/office/drawing/2014/main" id="{387C9F82-1FCD-F01C-AF97-81F26301F578}"/>
               </a:ext>
             </a:extLst>
           </p:cNvPr>
@@ -6236,8 +6042,8 @@
         </p:nvSpPr>
         <p:spPr>
           <a:xfrm>
-            <a:off x="4243761" y="-58006"/>
-            <a:ext cx="3585789" cy="778698"/>
+            <a:off x="4099944" y="-158127"/>
+            <a:ext cx="3992112" cy="778698"/>
           </a:xfrm>
         </p:spPr>
         <p:txBody>
@@ -6249,20 +6055,20 @@
             <a:r>
               <a:rPr lang="fr-FR" sz="4000" dirty="0">
                 <a:solidFill>
-                  <a:srgbClr val="FFFF00"/>
+                  <a:schemeClr val="accent3"/>
                 </a:solidFill>
               </a:rPr>
-              <a:t>Efficientnetv2</a:t>
+              <a:t>AZURE FUNCTION</a:t>
             </a:r>
           </a:p>
         </p:txBody>
       </p:sp>
       <p:pic>
         <p:nvPicPr>
-          <p:cNvPr id="4" name="Image 3" descr="Une image contenant texte, capture d’écran, Police&#10;&#10;Le contenu généré par l’IA peut être incorrect.">
+          <p:cNvPr id="4" name="Image 3" descr="Une image contenant texte, capture d’écran, logiciel, Police&#10;&#10;Le contenu généré par l’IA peut être incorrect.">
             <a:extLst>
               <a:ext uri="{FF2B5EF4-FFF2-40B4-BE49-F238E27FC236}">
-                <a16:creationId xmlns:a16="http://schemas.microsoft.com/office/drawing/2014/main" id="{03EBD2A7-CF46-42D3-59F2-8266D158FD37}"/>
+                <a16:creationId xmlns:a16="http://schemas.microsoft.com/office/drawing/2014/main" id="{4DFB00CD-997E-3A0B-6D08-BCFCDAEEB0DA}"/>
               </a:ext>
             </a:extLst>
           </p:cNvPr>
@@ -6285,104 +6091,18 @@
         </p:blipFill>
         <p:spPr>
           <a:xfrm>
-            <a:off x="204714" y="1136098"/>
-            <a:ext cx="11652913" cy="2864698"/>
+            <a:off x="1420403" y="1271764"/>
+            <a:ext cx="9351194" cy="4574855"/>
           </a:xfrm>
           <a:prstGeom prst="rect">
             <a:avLst/>
           </a:prstGeom>
         </p:spPr>
       </p:pic>
-      <p:sp>
-        <p:nvSpPr>
-          <p:cNvPr id="5" name="ZoneTexte 4">
-            <a:extLst>
-              <a:ext uri="{FF2B5EF4-FFF2-40B4-BE49-F238E27FC236}">
-                <a16:creationId xmlns:a16="http://schemas.microsoft.com/office/drawing/2014/main" id="{C3217C7E-EA6B-CFE0-1931-9FEA62A6B760}"/>
-              </a:ext>
-            </a:extLst>
-          </p:cNvPr>
-          <p:cNvSpPr txBox="1"/>
-          <p:nvPr/>
-        </p:nvSpPr>
-        <p:spPr>
-          <a:xfrm>
-            <a:off x="2020854" y="4705207"/>
-            <a:ext cx="8150291" cy="1169551"/>
-          </a:xfrm>
-          <a:prstGeom prst="rect">
-            <a:avLst/>
-          </a:prstGeom>
-          <a:gradFill flip="none" rotWithShape="1">
-            <a:gsLst>
-              <a:gs pos="0">
-                <a:schemeClr val="dk1">
-                  <a:lumMod val="67000"/>
-                </a:schemeClr>
-              </a:gs>
-              <a:gs pos="48000">
-                <a:schemeClr val="dk1">
-                  <a:lumMod val="97000"/>
-                  <a:lumOff val="3000"/>
-                </a:schemeClr>
-              </a:gs>
-              <a:gs pos="100000">
-                <a:schemeClr val="dk1">
-                  <a:lumMod val="60000"/>
-                  <a:lumOff val="40000"/>
-                </a:schemeClr>
-              </a:gs>
-            </a:gsLst>
-            <a:lin ang="16200000" scaled="1"/>
-            <a:tileRect/>
-          </a:gradFill>
-          <a:ln>
-            <a:noFill/>
-          </a:ln>
-        </p:spPr>
-        <p:style>
-          <a:lnRef idx="0">
-            <a:scrgbClr r="0" g="0" b="0"/>
-          </a:lnRef>
-          <a:fillRef idx="0">
-            <a:scrgbClr r="0" g="0" b="0"/>
-          </a:fillRef>
-          <a:effectRef idx="0">
-            <a:scrgbClr r="0" g="0" b="0"/>
-          </a:effectRef>
-          <a:fontRef idx="minor">
-            <a:schemeClr val="lt1"/>
-          </a:fontRef>
-        </p:style>
-        <p:txBody>
-          <a:bodyPr wrap="square" rtlCol="0">
-            <a:spAutoFit/>
-          </a:bodyPr>
-          <a:lstStyle/>
-          <a:p>
-            <a:r>
-              <a:rPr lang="fr-FR" sz="1400" dirty="0"/>
-              <a:t>L’architecture EfficientNetV2 repose sur un principe de </a:t>
-            </a:r>
-            <a:r>
-              <a:rPr lang="fr-FR" sz="1400" i="1" dirty="0" err="1"/>
-              <a:t>scaling</a:t>
-            </a:r>
-            <a:r>
-              <a:rPr lang="fr-FR" sz="1400" i="1" dirty="0"/>
-              <a:t> conjoint</a:t>
-            </a:r>
-            <a:r>
-              <a:rPr lang="fr-FR" sz="1400" dirty="0"/>
-              <a:t>, dans lequel la complexité du modèle est répartie de manière équilibrée entre la profondeur, la largeur et la résolution d’entrée. Cette approche permet de faire croître le modèle sans surdimensionner un seul paramètre, en optimisant l’utilisation du budget de calcul. En pratique, ce mécanisme vise à améliorer l’efficacité réelle du réseau, en particulier dans des contextes contraints en ressources, comme une preuve de concept exécutée sur CPU.</a:t>
-            </a:r>
-          </a:p>
-        </p:txBody>
-      </p:sp>
     </p:spTree>
     <p:extLst>
       <p:ext uri="{BB962C8B-B14F-4D97-AF65-F5344CB8AC3E}">
-        <p14:creationId xmlns:p14="http://schemas.microsoft.com/office/powerpoint/2010/main" val="1601428099"/>
+        <p14:creationId xmlns:p14="http://schemas.microsoft.com/office/powerpoint/2010/main" val="3988635316"/>
       </p:ext>
     </p:extLst>
   </p:cSld>
@@ -6398,7 +6118,7 @@
     <p:bg>
       <p:bgPr>
         <a:solidFill>
-          <a:schemeClr val="accent1"/>
+          <a:schemeClr val="tx2"/>
         </a:solidFill>
         <a:effectLst/>
       </p:bgPr>
@@ -6408,7 +6128,7 @@
         <p:cNvPr id="1" name="">
           <a:extLst>
             <a:ext uri="{FF2B5EF4-FFF2-40B4-BE49-F238E27FC236}">
-              <a16:creationId xmlns:a16="http://schemas.microsoft.com/office/drawing/2014/main" id="{871206DF-1816-E841-61B0-17BD173255C9}"/>
+              <a16:creationId xmlns:a16="http://schemas.microsoft.com/office/drawing/2014/main" id="{632E18E2-6FBE-D260-C209-84E5A9C6B914}"/>
             </a:ext>
           </a:extLst>
         </p:cNvPr>
@@ -6425,10 +6145,10 @@
       </p:grpSpPr>
       <p:sp>
         <p:nvSpPr>
-          <p:cNvPr id="2" name="Titre 1">
+          <p:cNvPr id="6" name="Titre 1">
             <a:extLst>
               <a:ext uri="{FF2B5EF4-FFF2-40B4-BE49-F238E27FC236}">
-                <a16:creationId xmlns:a16="http://schemas.microsoft.com/office/drawing/2014/main" id="{E41A7920-749B-FF23-5081-895E7A3EBF08}"/>
+                <a16:creationId xmlns:a16="http://schemas.microsoft.com/office/drawing/2014/main" id="{006CF8FE-7BBF-A908-D181-49C8750B8442}"/>
               </a:ext>
             </a:extLst>
           </p:cNvPr>
@@ -6441,33 +6161,33 @@
         </p:nvSpPr>
         <p:spPr>
           <a:xfrm>
-            <a:off x="4094486" y="-158907"/>
-            <a:ext cx="4003023" cy="778698"/>
+            <a:off x="4598434" y="-175342"/>
+            <a:ext cx="3538320" cy="778698"/>
           </a:xfrm>
         </p:spPr>
         <p:txBody>
           <a:bodyPr anchor="ctr">
-            <a:normAutofit fontScale="90000"/>
+            <a:normAutofit/>
           </a:bodyPr>
           <a:lstStyle/>
           <a:p>
             <a:r>
               <a:rPr lang="fr-FR" sz="4000" dirty="0">
                 <a:solidFill>
-                  <a:srgbClr val="FFFF00"/>
+                  <a:schemeClr val="accent3"/>
                 </a:solidFill>
               </a:rPr>
-              <a:t>VERSUS théorique</a:t>
+              <a:t>CONCLUSION</a:t>
             </a:r>
           </a:p>
         </p:txBody>
       </p:sp>
       <p:pic>
         <p:nvPicPr>
-          <p:cNvPr id="4" name="Image 3" descr="Une image contenant texte, capture d’écran, menu, Police&#10;&#10;Le contenu généré par l’IA peut être incorrect.">
+          <p:cNvPr id="3" name="Image 2" descr="Une image contenant texte, capture d’écran, menu, Police&#10;&#10;Le contenu généré par l’IA peut être incorrect.">
             <a:extLst>
               <a:ext uri="{FF2B5EF4-FFF2-40B4-BE49-F238E27FC236}">
-                <a16:creationId xmlns:a16="http://schemas.microsoft.com/office/drawing/2014/main" id="{6D992FEE-5424-DFDB-9F33-A60B90175363}"/>
+                <a16:creationId xmlns:a16="http://schemas.microsoft.com/office/drawing/2014/main" id="{006B81C2-69DF-CCFB-531B-A111D7B94B06}"/>
               </a:ext>
             </a:extLst>
           </p:cNvPr>
@@ -6490,100 +6210,18 @@
         </p:blipFill>
         <p:spPr>
           <a:xfrm>
-            <a:off x="1970391" y="619791"/>
-            <a:ext cx="8251209" cy="4497421"/>
+            <a:off x="1752486" y="671887"/>
+            <a:ext cx="9230215" cy="5967748"/>
           </a:xfrm>
           <a:prstGeom prst="rect">
             <a:avLst/>
           </a:prstGeom>
         </p:spPr>
       </p:pic>
-      <p:sp>
-        <p:nvSpPr>
-          <p:cNvPr id="6" name="ZoneTexte 5">
-            <a:extLst>
-              <a:ext uri="{FF2B5EF4-FFF2-40B4-BE49-F238E27FC236}">
-                <a16:creationId xmlns:a16="http://schemas.microsoft.com/office/drawing/2014/main" id="{47F56EFD-0464-CBC8-56D8-FB389353284D}"/>
-              </a:ext>
-            </a:extLst>
-          </p:cNvPr>
-          <p:cNvSpPr txBox="1"/>
-          <p:nvPr/>
-        </p:nvSpPr>
-        <p:spPr>
-          <a:xfrm>
-            <a:off x="2512684" y="5391007"/>
-            <a:ext cx="7166625" cy="1169551"/>
-          </a:xfrm>
-          <a:prstGeom prst="rect">
-            <a:avLst/>
-          </a:prstGeom>
-          <a:gradFill flip="none" rotWithShape="1">
-            <a:gsLst>
-              <a:gs pos="0">
-                <a:schemeClr val="dk1">
-                  <a:lumMod val="67000"/>
-                </a:schemeClr>
-              </a:gs>
-              <a:gs pos="48000">
-                <a:schemeClr val="dk1">
-                  <a:lumMod val="97000"/>
-                  <a:lumOff val="3000"/>
-                </a:schemeClr>
-              </a:gs>
-              <a:gs pos="100000">
-                <a:schemeClr val="dk1">
-                  <a:lumMod val="60000"/>
-                  <a:lumOff val="40000"/>
-                </a:schemeClr>
-              </a:gs>
-            </a:gsLst>
-            <a:lin ang="16200000" scaled="1"/>
-            <a:tileRect/>
-          </a:gradFill>
-          <a:ln>
-            <a:noFill/>
-          </a:ln>
-        </p:spPr>
-        <p:style>
-          <a:lnRef idx="0">
-            <a:scrgbClr r="0" g="0" b="0"/>
-          </a:lnRef>
-          <a:fillRef idx="0">
-            <a:scrgbClr r="0" g="0" b="0"/>
-          </a:fillRef>
-          <a:effectRef idx="0">
-            <a:scrgbClr r="0" g="0" b="0"/>
-          </a:effectRef>
-          <a:fontRef idx="minor">
-            <a:schemeClr val="lt1"/>
-          </a:fontRef>
-        </p:style>
-        <p:txBody>
-          <a:bodyPr wrap="square" rtlCol="0">
-            <a:spAutoFit/>
-          </a:bodyPr>
-          <a:lstStyle/>
-          <a:p>
-            <a:r>
-              <a:rPr lang="fr-FR" sz="1400" dirty="0"/>
-              <a:t>Cette comparaison théorique met en évidence l’évolution apportée par EfficientNetV2 par rapport à VGG16, en termes de modernité et d’efficacité d’entraînement. Tout en conservant une base maîtrisée et comparable à la </a:t>
-            </a:r>
-            <a:r>
-              <a:rPr lang="fr-FR" sz="1400" dirty="0" err="1"/>
-              <a:t>baseline</a:t>
-            </a:r>
-            <a:r>
-              <a:rPr lang="fr-FR" sz="1400" dirty="0"/>
-              <a:t> du Projet 8, EfficientNetV2 permet d’accélérer les itérations et d’ouvrir la voie à une évaluation plus orientée performance. Cette évolution théorique sera désormais confrontée aux résultats observés sur les métriques de segmentation.</a:t>
-            </a:r>
-          </a:p>
-        </p:txBody>
-      </p:sp>
     </p:spTree>
     <p:extLst>
       <p:ext uri="{BB962C8B-B14F-4D97-AF65-F5344CB8AC3E}">
-        <p14:creationId xmlns:p14="http://schemas.microsoft.com/office/powerpoint/2010/main" val="1465532208"/>
+        <p14:creationId xmlns:p14="http://schemas.microsoft.com/office/powerpoint/2010/main" val="3284045669"/>
       </p:ext>
     </p:extLst>
   </p:cSld>
@@ -6599,7 +6237,7 @@
     <p:bg>
       <p:bgPr>
         <a:solidFill>
-          <a:schemeClr val="accent1"/>
+          <a:schemeClr val="bg1"/>
         </a:solidFill>
         <a:effectLst/>
       </p:bgPr>
@@ -6609,7 +6247,7 @@
         <p:cNvPr id="1" name="">
           <a:extLst>
             <a:ext uri="{FF2B5EF4-FFF2-40B4-BE49-F238E27FC236}">
-              <a16:creationId xmlns:a16="http://schemas.microsoft.com/office/drawing/2014/main" id="{209C5FA5-6214-8123-B2EB-B3DA442663E0}"/>
+              <a16:creationId xmlns:a16="http://schemas.microsoft.com/office/drawing/2014/main" id="{1C68715D-A2B5-DCF4-CF6C-A9FB950062D9}"/>
             </a:ext>
           </a:extLst>
         </p:cNvPr>
@@ -6624,61 +6262,62 @@
           <a:chExt cx="0" cy="0"/>
         </a:xfrm>
       </p:grpSpPr>
-      <p:sp>
-        <p:nvSpPr>
-          <p:cNvPr id="2" name="Titre 1">
+      <p:pic>
+        <p:nvPicPr>
+          <p:cNvPr id="16" name="Picture 3" descr="Une image contenant rideau, capture d’écran, art, léger&#10;&#10;Description générée automatiquement">
             <a:extLst>
               <a:ext uri="{FF2B5EF4-FFF2-40B4-BE49-F238E27FC236}">
-                <a16:creationId xmlns:a16="http://schemas.microsoft.com/office/drawing/2014/main" id="{4728DC4D-1D20-F086-DA17-CB326BB4F211}"/>
+                <a16:creationId xmlns:a16="http://schemas.microsoft.com/office/drawing/2014/main" id="{E032A3CE-58AD-B19A-7A0B-E8E4C69AE7F0}"/>
               </a:ext>
             </a:extLst>
           </p:cNvPr>
-          <p:cNvSpPr>
-            <a:spLocks noGrp="1"/>
-          </p:cNvSpPr>
-          <p:nvPr>
-            <p:ph type="title"/>
-          </p:nvPr>
-        </p:nvSpPr>
-        <p:spPr>
-          <a:xfrm>
-            <a:off x="4094486" y="-158907"/>
-            <a:ext cx="4003023" cy="778698"/>
-          </a:xfrm>
-        </p:spPr>
-        <p:txBody>
-          <a:bodyPr anchor="ctr">
-            <a:normAutofit fontScale="90000"/>
-          </a:bodyPr>
-          <a:lstStyle/>
-          <a:p>
-            <a:r>
-              <a:rPr lang="fr-FR" sz="4000" dirty="0">
-                <a:solidFill>
-                  <a:srgbClr val="FFFF00"/>
-                </a:solidFill>
-              </a:rPr>
-              <a:t>VERSUS métriques</a:t>
-            </a:r>
-          </a:p>
-        </p:txBody>
-      </p:sp>
-      <p:sp>
-        <p:nvSpPr>
-          <p:cNvPr id="6" name="ZoneTexte 5">
+          <p:cNvPicPr>
+            <a:picLocks noChangeAspect="1"/>
+          </p:cNvPicPr>
+          <p:nvPr/>
+        </p:nvPicPr>
+        <p:blipFill>
+          <a:blip r:embed="rId2"/>
+          <a:srcRect b="19929"/>
+          <a:stretch/>
+        </p:blipFill>
+        <p:spPr>
+          <a:xfrm>
+            <a:off x="1" y="0"/>
+            <a:ext cx="12191999" cy="6857990"/>
+          </a:xfrm>
+          <a:prstGeom prst="rect">
+            <a:avLst/>
+          </a:prstGeom>
+        </p:spPr>
+      </p:pic>
+      <p:sp>
+        <p:nvSpPr>
+          <p:cNvPr id="36" name="Rectangle 35">
             <a:extLst>
               <a:ext uri="{FF2B5EF4-FFF2-40B4-BE49-F238E27FC236}">
-                <a16:creationId xmlns:a16="http://schemas.microsoft.com/office/drawing/2014/main" id="{15D5581C-B424-B70A-6410-B97A8F2A5971}"/>
+                <a16:creationId xmlns:a16="http://schemas.microsoft.com/office/drawing/2014/main" id="{007891EC-4501-44ED-A8C8-B11B6DB767AB}"/>
+              </a:ext>
+              <a:ext uri="{C183D7F6-B498-43B3-948B-1728B52AA6E4}">
+                <adec:decorative xmlns:adec="http://schemas.microsoft.com/office/drawing/2017/decorative" val="1"/>
               </a:ext>
             </a:extLst>
           </p:cNvPr>
-          <p:cNvSpPr txBox="1"/>
-          <p:nvPr/>
-        </p:nvSpPr>
-        <p:spPr>
-          <a:xfrm>
-            <a:off x="2313611" y="5232257"/>
-            <a:ext cx="7564768" cy="1169551"/>
+          <p:cNvSpPr>
+            <a:spLocks noGrp="1" noRot="1" noChangeAspect="1" noMove="1" noResize="1" noEditPoints="1" noAdjustHandles="1" noChangeArrowheads="1" noChangeShapeType="1" noTextEdit="1"/>
+          </p:cNvSpPr>
+          <p:nvPr>
+            <p:extLst>
+              <p:ext uri="{386F3935-93C4-4BCD-93E2-E3B085C9AB24}">
+                <p16:designElem xmlns:p16="http://schemas.microsoft.com/office/powerpoint/2015/main" val="1"/>
+              </p:ext>
+            </p:extLst>
+          </p:nvPr>
+        </p:nvSpPr>
+        <p:spPr>
+          <a:xfrm>
+            <a:off x="0" y="2207602"/>
+            <a:ext cx="12191999" cy="3162146"/>
           </a:xfrm>
           <a:prstGeom prst="rect">
             <a:avLst/>
@@ -6686,20 +6325,18 @@
           <a:gradFill flip="none" rotWithShape="1">
             <a:gsLst>
               <a:gs pos="0">
-                <a:schemeClr val="dk1">
-                  <a:lumMod val="67000"/>
+                <a:schemeClr val="tx2">
+                  <a:alpha val="0"/>
                 </a:schemeClr>
               </a:gs>
-              <a:gs pos="48000">
-                <a:schemeClr val="dk1">
-                  <a:lumMod val="97000"/>
-                  <a:lumOff val="3000"/>
+              <a:gs pos="50000">
+                <a:schemeClr val="tx2">
+                  <a:alpha val="35000"/>
                 </a:schemeClr>
               </a:gs>
               <a:gs pos="100000">
-                <a:schemeClr val="dk1">
-                  <a:lumMod val="60000"/>
-                  <a:lumOff val="40000"/>
+                <a:schemeClr val="tx2">
+                  <a:alpha val="0"/>
                 </a:schemeClr>
               </a:gs>
             </a:gsLst>
@@ -6711,72 +6348,254 @@
           </a:ln>
         </p:spPr>
         <p:style>
-          <a:lnRef idx="0">
-            <a:scrgbClr r="0" g="0" b="0"/>
+          <a:lnRef idx="2">
+            <a:schemeClr val="accent1">
+              <a:shade val="50000"/>
+            </a:schemeClr>
           </a:lnRef>
-          <a:fillRef idx="0">
-            <a:scrgbClr r="0" g="0" b="0"/>
+          <a:fillRef idx="1">
+            <a:schemeClr val="accent1"/>
           </a:fillRef>
           <a:effectRef idx="0">
-            <a:scrgbClr r="0" g="0" b="0"/>
+            <a:schemeClr val="accent1"/>
           </a:effectRef>
           <a:fontRef idx="minor">
             <a:schemeClr val="lt1"/>
           </a:fontRef>
         </p:style>
         <p:txBody>
-          <a:bodyPr wrap="square" rtlCol="0">
-            <a:spAutoFit/>
+          <a:bodyPr rtlCol="0" anchor="ctr"/>
+          <a:lstStyle/>
+          <a:p>
+            <a:pPr algn="ctr"/>
+            <a:endParaRPr lang="en-US"/>
+          </a:p>
+        </p:txBody>
+      </p:sp>
+      <p:sp>
+        <p:nvSpPr>
+          <p:cNvPr id="6" name="Titre 5">
+            <a:extLst>
+              <a:ext uri="{FF2B5EF4-FFF2-40B4-BE49-F238E27FC236}">
+                <a16:creationId xmlns:a16="http://schemas.microsoft.com/office/drawing/2014/main" id="{854E41FE-6390-1D23-C23A-BDB443340F02}"/>
+              </a:ext>
+            </a:extLst>
+          </p:cNvPr>
+          <p:cNvSpPr>
+            <a:spLocks noGrp="1"/>
+          </p:cNvSpPr>
+          <p:nvPr>
+            <p:ph type="ctrTitle"/>
+          </p:nvPr>
+        </p:nvSpPr>
+        <p:spPr>
+          <a:xfrm>
+            <a:off x="643466" y="643467"/>
+            <a:ext cx="10905059" cy="3330353"/>
+          </a:xfrm>
+          <a:effectLst>
+            <a:outerShdw blurRad="50800" dist="38100" dir="2700000" algn="tl" rotWithShape="0">
+              <a:prstClr val="black">
+                <a:alpha val="40000"/>
+              </a:prstClr>
+            </a:outerShdw>
+          </a:effectLst>
+        </p:spPr>
+        <p:txBody>
+          <a:bodyPr vert="horz" lIns="91440" tIns="45720" rIns="91440" bIns="45720" rtlCol="0">
+            <a:normAutofit/>
           </a:bodyPr>
           <a:lstStyle/>
           <a:p>
-            <a:r>
-              <a:rPr lang="fr-FR" sz="1400" dirty="0"/>
-              <a:t>La comparaison des métriques met en évidence des performances globalement proches pour les deux modèles, entraînés dans des conditions strictement identiques afin de garantir une évaluation impartiale. EfficientNetV2B0 affiche néanmoins des scores légèrement supérieurs sur l’ensemble des indicateurs, ainsi qu’une convergence plus rapide. Ces résultats suggèrent qu’un backbone plus moderne permet d’améliorer la qualité de segmentation tout en conservant une dynamique d’apprentissage stable.</a:t>
-            </a:r>
-          </a:p>
-        </p:txBody>
-      </p:sp>
-      <p:pic>
-        <p:nvPicPr>
-          <p:cNvPr id="5" name="Image 4" descr="Une image contenant texte, capture d’écran, Police&#10;&#10;Le contenu généré par l’IA peut être incorrect.">
+            <a:pPr algn="ctr"/>
+            <a:r>
+              <a:rPr lang="en-US" dirty="0">
+                <a:solidFill>
+                  <a:schemeClr val="bg1"/>
+                </a:solidFill>
+              </a:rPr>
+              <a:t>Merci de </a:t>
+            </a:r>
+            <a:r>
+              <a:rPr lang="en-US" dirty="0" err="1">
+                <a:solidFill>
+                  <a:schemeClr val="bg1"/>
+                </a:solidFill>
+              </a:rPr>
+              <a:t>votre</a:t>
+            </a:r>
+            <a:r>
+              <a:rPr lang="en-US" dirty="0">
+                <a:solidFill>
+                  <a:schemeClr val="bg1"/>
+                </a:solidFill>
+              </a:rPr>
+              <a:t> </a:t>
+            </a:r>
+            <a:r>
+              <a:rPr lang="en-US" dirty="0" err="1">
+                <a:solidFill>
+                  <a:schemeClr val="bg1"/>
+                </a:solidFill>
+              </a:rPr>
+              <a:t>ecoute</a:t>
+            </a:r>
+            <a:endParaRPr lang="en-US" dirty="0">
+              <a:solidFill>
+                <a:schemeClr val="bg1"/>
+              </a:solidFill>
+            </a:endParaRPr>
+          </a:p>
+          <a:p>
+            <a:pPr algn="ctr"/>
+            <a:br>
+              <a:rPr lang="en-US" dirty="0">
+                <a:solidFill>
+                  <a:schemeClr val="bg1"/>
+                </a:solidFill>
+              </a:rPr>
+            </a:br>
+            <a:endParaRPr lang="en-US" dirty="0">
+              <a:solidFill>
+                <a:schemeClr val="bg1"/>
+              </a:solidFill>
+            </a:endParaRPr>
+          </a:p>
+        </p:txBody>
+      </p:sp>
+      <p:sp>
+        <p:nvSpPr>
+          <p:cNvPr id="3" name="Sous-titre 2">
             <a:extLst>
               <a:ext uri="{FF2B5EF4-FFF2-40B4-BE49-F238E27FC236}">
-                <a16:creationId xmlns:a16="http://schemas.microsoft.com/office/drawing/2014/main" id="{1B1FADAB-E398-7C72-D923-B4C86CAAD221}"/>
+                <a16:creationId xmlns:a16="http://schemas.microsoft.com/office/drawing/2014/main" id="{8294FA5C-C2C6-18D9-1036-09AC0B46704B}"/>
               </a:ext>
             </a:extLst>
           </p:cNvPr>
-          <p:cNvPicPr>
-            <a:picLocks noChangeAspect="1"/>
-          </p:cNvPicPr>
-          <p:nvPr/>
-        </p:nvPicPr>
-        <p:blipFill>
-          <a:blip r:embed="rId2">
-            <a:extLst>
-              <a:ext uri="{28A0092B-C50C-407E-A947-70E740481C1C}">
-                <a14:useLocalDpi xmlns:a14="http://schemas.microsoft.com/office/drawing/2010/main" val="0"/>
-              </a:ext>
-            </a:extLst>
-          </a:blip>
-          <a:stretch>
-            <a:fillRect/>
-          </a:stretch>
-        </p:blipFill>
-        <p:spPr>
-          <a:xfrm>
-            <a:off x="889478" y="619791"/>
-            <a:ext cx="10413035" cy="4321333"/>
-          </a:xfrm>
-          <a:prstGeom prst="rect">
+          <p:cNvSpPr>
+            <a:spLocks noGrp="1"/>
+          </p:cNvSpPr>
+          <p:nvPr>
+            <p:ph type="subTitle" idx="1"/>
+          </p:nvPr>
+        </p:nvSpPr>
+        <p:spPr>
+          <a:xfrm>
+            <a:off x="643466" y="4133135"/>
+            <a:ext cx="10902016" cy="1454510"/>
+          </a:xfrm>
+          <a:effectLst>
+            <a:outerShdw blurRad="50800" dist="38100" dir="2700000" algn="tl" rotWithShape="0">
+              <a:prstClr val="black">
+                <a:alpha val="40000"/>
+              </a:prstClr>
+            </a:outerShdw>
+          </a:effectLst>
+        </p:spPr>
+        <p:txBody>
+          <a:bodyPr vert="horz" lIns="91440" tIns="45720" rIns="91440" bIns="45720" rtlCol="0">
+            <a:normAutofit/>
+          </a:bodyPr>
+          <a:lstStyle/>
+          <a:p>
+            <a:pPr algn="ctr"/>
+            <a:r>
+              <a:rPr lang="en-US" sz="1800" b="1" dirty="0" err="1">
+                <a:solidFill>
+                  <a:schemeClr val="bg1"/>
+                </a:solidFill>
+                <a:effectLst/>
+              </a:rPr>
+              <a:t>Projet</a:t>
+            </a:r>
+            <a:r>
+              <a:rPr lang="en-US" sz="1800" b="1" dirty="0">
+                <a:solidFill>
+                  <a:schemeClr val="bg1"/>
+                </a:solidFill>
+                <a:effectLst/>
+              </a:rPr>
+              <a:t> 10</a:t>
+            </a:r>
+            <a:br>
+              <a:rPr lang="en-US" sz="1800" b="1" i="0" dirty="0">
+                <a:solidFill>
+                  <a:schemeClr val="bg1"/>
+                </a:solidFill>
+                <a:effectLst/>
+              </a:rPr>
+            </a:br>
+            <a:endParaRPr lang="en-US" sz="1800" b="1" dirty="0">
+              <a:solidFill>
+                <a:schemeClr val="bg1"/>
+              </a:solidFill>
+            </a:endParaRPr>
+          </a:p>
+        </p:txBody>
+      </p:sp>
+      <p:cxnSp>
+        <p:nvCxnSpPr>
+          <p:cNvPr id="38" name="Straight Connector 37">
+            <a:extLst>
+              <a:ext uri="{FF2B5EF4-FFF2-40B4-BE49-F238E27FC236}">
+                <a16:creationId xmlns:a16="http://schemas.microsoft.com/office/drawing/2014/main" id="{34E5597F-CE67-4085-9548-E6A8036DA3BB}"/>
+              </a:ext>
+              <a:ext uri="{C183D7F6-B498-43B3-948B-1728B52AA6E4}">
+                <adec:decorative xmlns:adec="http://schemas.microsoft.com/office/drawing/2017/decorative" val="1"/>
+              </a:ext>
+            </a:extLst>
+          </p:cNvPr>
+          <p:cNvCxnSpPr>
+            <a:cxnSpLocks noGrp="1" noRot="1" noChangeAspect="1" noMove="1" noResize="1" noEditPoints="1" noAdjustHandles="1" noChangeArrowheads="1" noChangeShapeType="1"/>
+          </p:cNvCxnSpPr>
+          <p:nvPr>
+            <p:extLst>
+              <p:ext uri="{386F3935-93C4-4BCD-93E2-E3B085C9AB24}">
+                <p16:designElem xmlns:p16="http://schemas.microsoft.com/office/powerpoint/2015/main" val="1"/>
+              </p:ext>
+            </p:extLst>
+          </p:nvPr>
+        </p:nvCxnSpPr>
+        <p:spPr>
+          <a:xfrm>
+            <a:off x="3393881" y="4035362"/>
+            <a:ext cx="5404237" cy="0"/>
+          </a:xfrm>
+          <a:prstGeom prst="line">
             <a:avLst/>
           </a:prstGeom>
-        </p:spPr>
-      </p:pic>
+          <a:ln>
+            <a:solidFill>
+              <a:schemeClr val="bg1"/>
+            </a:solidFill>
+          </a:ln>
+          <a:effectLst>
+            <a:outerShdw blurRad="50800" dist="38100" dir="2700000" algn="tl" rotWithShape="0">
+              <a:prstClr val="black">
+                <a:alpha val="40000"/>
+              </a:prstClr>
+            </a:outerShdw>
+          </a:effectLst>
+        </p:spPr>
+        <p:style>
+          <a:lnRef idx="1">
+            <a:schemeClr val="accent1"/>
+          </a:lnRef>
+          <a:fillRef idx="0">
+            <a:schemeClr val="accent1"/>
+          </a:fillRef>
+          <a:effectRef idx="0">
+            <a:schemeClr val="accent1"/>
+          </a:effectRef>
+          <a:fontRef idx="minor">
+            <a:schemeClr val="tx1"/>
+          </a:fontRef>
+        </p:style>
+      </p:cxnSp>
     </p:spTree>
     <p:extLst>
       <p:ext uri="{BB962C8B-B14F-4D97-AF65-F5344CB8AC3E}">
-        <p14:creationId xmlns:p14="http://schemas.microsoft.com/office/powerpoint/2010/main" val="2712135103"/>
+        <p14:creationId xmlns:p14="http://schemas.microsoft.com/office/powerpoint/2010/main" val="3170525015"/>
       </p:ext>
     </p:extLst>
   </p:cSld>
@@ -7101,1078 +6920,6 @@
   </p:cSld>
   <p:clrMapOvr>
     <a:overrideClrMapping bg1="dk1" tx1="lt1" bg2="dk2" tx2="lt2" accent1="accent1" accent2="accent2" accent3="accent3" accent4="accent4" accent5="accent5" accent6="accent6" hlink="hlink" folHlink="folHlink"/>
-  </p:clrMapOvr>
-</p:sld>
-</file>
-
-<file path=ppt/slides/slide20.xml><?xml version="1.0" encoding="utf-8"?>
-<p:sld xmlns:a="http://schemas.openxmlformats.org/drawingml/2006/main" xmlns:r="http://schemas.openxmlformats.org/officeDocument/2006/relationships" xmlns:p="http://schemas.openxmlformats.org/presentationml/2006/main">
-  <p:cSld>
-    <p:bg>
-      <p:bgPr>
-        <a:solidFill>
-          <a:schemeClr val="tx2"/>
-        </a:solidFill>
-        <a:effectLst/>
-      </p:bgPr>
-    </p:bg>
-    <p:spTree>
-      <p:nvGrpSpPr>
-        <p:cNvPr id="1" name="">
-          <a:extLst>
-            <a:ext uri="{FF2B5EF4-FFF2-40B4-BE49-F238E27FC236}">
-              <a16:creationId xmlns:a16="http://schemas.microsoft.com/office/drawing/2014/main" id="{F2D012D0-E35B-F977-9B67-D220C5D1E3D7}"/>
-            </a:ext>
-          </a:extLst>
-        </p:cNvPr>
-        <p:cNvGrpSpPr/>
-        <p:nvPr/>
-      </p:nvGrpSpPr>
-      <p:grpSpPr>
-        <a:xfrm>
-          <a:off x="0" y="0"/>
-          <a:ext cx="0" cy="0"/>
-          <a:chOff x="0" y="0"/>
-          <a:chExt cx="0" cy="0"/>
-        </a:xfrm>
-      </p:grpSpPr>
-      <p:sp>
-        <p:nvSpPr>
-          <p:cNvPr id="2" name="Titre 1">
-            <a:extLst>
-              <a:ext uri="{FF2B5EF4-FFF2-40B4-BE49-F238E27FC236}">
-                <a16:creationId xmlns:a16="http://schemas.microsoft.com/office/drawing/2014/main" id="{2154440F-6728-3804-008F-01B6F5027723}"/>
-              </a:ext>
-            </a:extLst>
-          </p:cNvPr>
-          <p:cNvSpPr>
-            <a:spLocks noGrp="1"/>
-          </p:cNvSpPr>
-          <p:nvPr>
-            <p:ph type="title"/>
-          </p:nvPr>
-        </p:nvSpPr>
-        <p:spPr>
-          <a:xfrm>
-            <a:off x="3608838" y="-192304"/>
-            <a:ext cx="4974324" cy="778698"/>
-          </a:xfrm>
-        </p:spPr>
-        <p:txBody>
-          <a:bodyPr anchor="ctr">
-            <a:normAutofit fontScale="90000"/>
-          </a:bodyPr>
-          <a:lstStyle/>
-          <a:p>
-            <a:r>
-              <a:rPr lang="fr-FR" sz="4000" dirty="0">
-                <a:solidFill>
-                  <a:schemeClr val="accent3"/>
-                </a:solidFill>
-              </a:rPr>
-              <a:t>Conception </a:t>
-            </a:r>
-            <a:r>
-              <a:rPr lang="fr-FR" sz="4000" dirty="0" err="1">
-                <a:solidFill>
-                  <a:schemeClr val="accent3"/>
-                </a:solidFill>
-              </a:rPr>
-              <a:t>streamlit</a:t>
-            </a:r>
-            <a:endParaRPr lang="fr-FR" sz="4000" dirty="0">
-              <a:solidFill>
-                <a:schemeClr val="accent3"/>
-              </a:solidFill>
-            </a:endParaRPr>
-          </a:p>
-        </p:txBody>
-      </p:sp>
-      <p:sp>
-        <p:nvSpPr>
-          <p:cNvPr id="12" name="ZoneTexte 11">
-            <a:extLst>
-              <a:ext uri="{FF2B5EF4-FFF2-40B4-BE49-F238E27FC236}">
-                <a16:creationId xmlns:a16="http://schemas.microsoft.com/office/drawing/2014/main" id="{75365A89-97CF-2CB0-63E8-767A74C93D4F}"/>
-              </a:ext>
-            </a:extLst>
-          </p:cNvPr>
-          <p:cNvSpPr txBox="1"/>
-          <p:nvPr/>
-        </p:nvSpPr>
-        <p:spPr>
-          <a:xfrm>
-            <a:off x="2467347" y="5457227"/>
-            <a:ext cx="7257306" cy="1169551"/>
-          </a:xfrm>
-          <a:prstGeom prst="rect">
-            <a:avLst/>
-          </a:prstGeom>
-          <a:gradFill flip="none" rotWithShape="1">
-            <a:gsLst>
-              <a:gs pos="0">
-                <a:schemeClr val="dk1">
-                  <a:lumMod val="67000"/>
-                </a:schemeClr>
-              </a:gs>
-              <a:gs pos="48000">
-                <a:schemeClr val="dk1">
-                  <a:lumMod val="97000"/>
-                  <a:lumOff val="3000"/>
-                </a:schemeClr>
-              </a:gs>
-              <a:gs pos="100000">
-                <a:schemeClr val="dk1">
-                  <a:lumMod val="60000"/>
-                  <a:lumOff val="40000"/>
-                </a:schemeClr>
-              </a:gs>
-            </a:gsLst>
-            <a:lin ang="16200000" scaled="1"/>
-            <a:tileRect/>
-          </a:gradFill>
-          <a:ln>
-            <a:noFill/>
-          </a:ln>
-        </p:spPr>
-        <p:style>
-          <a:lnRef idx="0">
-            <a:scrgbClr r="0" g="0" b="0"/>
-          </a:lnRef>
-          <a:fillRef idx="0">
-            <a:scrgbClr r="0" g="0" b="0"/>
-          </a:fillRef>
-          <a:effectRef idx="0">
-            <a:scrgbClr r="0" g="0" b="0"/>
-          </a:effectRef>
-          <a:fontRef idx="minor">
-            <a:schemeClr val="lt1"/>
-          </a:fontRef>
-        </p:style>
-        <p:txBody>
-          <a:bodyPr wrap="square" rtlCol="0">
-            <a:spAutoFit/>
-          </a:bodyPr>
-          <a:lstStyle/>
-          <a:p>
-            <a:r>
-              <a:rPr lang="fr-FR" sz="1400" dirty="0"/>
-              <a:t>Le </a:t>
-            </a:r>
-            <a:r>
-              <a:rPr lang="fr-FR" sz="1400" dirty="0" err="1"/>
-              <a:t>dashboard</a:t>
-            </a:r>
-            <a:r>
-              <a:rPr lang="fr-FR" sz="1400" dirty="0"/>
-              <a:t> </a:t>
-            </a:r>
-            <a:r>
-              <a:rPr lang="fr-FR" sz="1400" dirty="0" err="1"/>
-              <a:t>Streamlit</a:t>
-            </a:r>
-            <a:r>
-              <a:rPr lang="fr-FR" sz="1400" dirty="0"/>
-              <a:t> intègre des choix de conception explicitement orientés accessibilité, directement au niveau du code. La mise en page et la typographie assurent une lisibilité stable à fort zoom, tandis que la navigation structurée et les visualisations non dépendantes de la couleur facilitent l’analyse. La gestion explicite des états et des erreurs renforce la robustesse et la fiabilité de l’interface dans un contexte de démonstration technique.</a:t>
-            </a:r>
-          </a:p>
-        </p:txBody>
-      </p:sp>
-      <p:pic>
-        <p:nvPicPr>
-          <p:cNvPr id="4" name="Image 3" descr="Une image contenant texte, capture d’écran, Police&#10;&#10;Le contenu généré par l’IA peut être incorrect.">
-            <a:extLst>
-              <a:ext uri="{FF2B5EF4-FFF2-40B4-BE49-F238E27FC236}">
-                <a16:creationId xmlns:a16="http://schemas.microsoft.com/office/drawing/2014/main" id="{AAA0DAAC-1E9B-2188-0682-5EF9E4AA56F4}"/>
-              </a:ext>
-            </a:extLst>
-          </p:cNvPr>
-          <p:cNvPicPr>
-            <a:picLocks noChangeAspect="1"/>
-          </p:cNvPicPr>
-          <p:nvPr/>
-        </p:nvPicPr>
-        <p:blipFill>
-          <a:blip r:embed="rId2">
-            <a:extLst>
-              <a:ext uri="{28A0092B-C50C-407E-A947-70E740481C1C}">
-                <a14:useLocalDpi xmlns:a14="http://schemas.microsoft.com/office/drawing/2010/main" val="0"/>
-              </a:ext>
-            </a:extLst>
-          </a:blip>
-          <a:stretch>
-            <a:fillRect/>
-          </a:stretch>
-        </p:blipFill>
-        <p:spPr>
-          <a:xfrm>
-            <a:off x="214950" y="586394"/>
-            <a:ext cx="11625618" cy="4676911"/>
-          </a:xfrm>
-          <a:prstGeom prst="rect">
-            <a:avLst/>
-          </a:prstGeom>
-        </p:spPr>
-      </p:pic>
-    </p:spTree>
-    <p:extLst>
-      <p:ext uri="{BB962C8B-B14F-4D97-AF65-F5344CB8AC3E}">
-        <p14:creationId xmlns:p14="http://schemas.microsoft.com/office/powerpoint/2010/main" val="3616014300"/>
-      </p:ext>
-    </p:extLst>
-  </p:cSld>
-  <p:clrMapOvr>
-    <a:masterClrMapping/>
-  </p:clrMapOvr>
-</p:sld>
-</file>
-
-<file path=ppt/slides/slide21.xml><?xml version="1.0" encoding="utf-8"?>
-<p:sld xmlns:a="http://schemas.openxmlformats.org/drawingml/2006/main" xmlns:r="http://schemas.openxmlformats.org/officeDocument/2006/relationships" xmlns:p="http://schemas.openxmlformats.org/presentationml/2006/main">
-  <p:cSld>
-    <p:bg>
-      <p:bgPr>
-        <a:solidFill>
-          <a:schemeClr val="tx2"/>
-        </a:solidFill>
-        <a:effectLst/>
-      </p:bgPr>
-    </p:bg>
-    <p:spTree>
-      <p:nvGrpSpPr>
-        <p:cNvPr id="1" name="">
-          <a:extLst>
-            <a:ext uri="{FF2B5EF4-FFF2-40B4-BE49-F238E27FC236}">
-              <a16:creationId xmlns:a16="http://schemas.microsoft.com/office/drawing/2014/main" id="{8F327552-424A-EBB6-B952-678BCA2C4894}"/>
-            </a:ext>
-          </a:extLst>
-        </p:cNvPr>
-        <p:cNvGrpSpPr/>
-        <p:nvPr/>
-      </p:nvGrpSpPr>
-      <p:grpSpPr>
-        <a:xfrm>
-          <a:off x="0" y="0"/>
-          <a:ext cx="0" cy="0"/>
-          <a:chOff x="0" y="0"/>
-          <a:chExt cx="0" cy="0"/>
-        </a:xfrm>
-      </p:grpSpPr>
-      <p:sp>
-        <p:nvSpPr>
-          <p:cNvPr id="2" name="Titre 1">
-            <a:extLst>
-              <a:ext uri="{FF2B5EF4-FFF2-40B4-BE49-F238E27FC236}">
-                <a16:creationId xmlns:a16="http://schemas.microsoft.com/office/drawing/2014/main" id="{940D1E8A-B6BD-5FAC-D291-A46265C22320}"/>
-              </a:ext>
-            </a:extLst>
-          </p:cNvPr>
-          <p:cNvSpPr>
-            <a:spLocks noGrp="1"/>
-          </p:cNvSpPr>
-          <p:nvPr>
-            <p:ph type="title"/>
-          </p:nvPr>
-        </p:nvSpPr>
-        <p:spPr>
-          <a:xfrm>
-            <a:off x="3422038" y="-205952"/>
-            <a:ext cx="5347920" cy="778698"/>
-          </a:xfrm>
-        </p:spPr>
-        <p:txBody>
-          <a:bodyPr anchor="ctr">
-            <a:normAutofit/>
-          </a:bodyPr>
-          <a:lstStyle/>
-          <a:p>
-            <a:r>
-              <a:rPr lang="fr-FR" sz="4000" dirty="0">
-                <a:solidFill>
-                  <a:schemeClr val="accent3"/>
-                </a:solidFill>
-              </a:rPr>
-              <a:t>INTEGRATION HEROKU</a:t>
-            </a:r>
-          </a:p>
-        </p:txBody>
-      </p:sp>
-      <p:pic>
-        <p:nvPicPr>
-          <p:cNvPr id="7" name="Image 6" descr="Une image contenant texte, capture d’écran, Police, logiciel&#10;&#10;Le contenu généré par l’IA peut être incorrect.">
-            <a:extLst>
-              <a:ext uri="{FF2B5EF4-FFF2-40B4-BE49-F238E27FC236}">
-                <a16:creationId xmlns:a16="http://schemas.microsoft.com/office/drawing/2014/main" id="{0A970A41-9377-41FD-C38E-37AD07C7AAB8}"/>
-              </a:ext>
-            </a:extLst>
-          </p:cNvPr>
-          <p:cNvPicPr>
-            <a:picLocks noChangeAspect="1"/>
-          </p:cNvPicPr>
-          <p:nvPr/>
-        </p:nvPicPr>
-        <p:blipFill>
-          <a:blip r:embed="rId2">
-            <a:extLst>
-              <a:ext uri="{28A0092B-C50C-407E-A947-70E740481C1C}">
-                <a14:useLocalDpi xmlns:a14="http://schemas.microsoft.com/office/drawing/2010/main" val="0"/>
-              </a:ext>
-            </a:extLst>
-          </a:blip>
-          <a:stretch>
-            <a:fillRect/>
-          </a:stretch>
-        </p:blipFill>
-        <p:spPr>
-          <a:xfrm>
-            <a:off x="996536" y="783328"/>
-            <a:ext cx="10198923" cy="5776381"/>
-          </a:xfrm>
-          <a:prstGeom prst="rect">
-            <a:avLst/>
-          </a:prstGeom>
-        </p:spPr>
-      </p:pic>
-    </p:spTree>
-    <p:extLst>
-      <p:ext uri="{BB962C8B-B14F-4D97-AF65-F5344CB8AC3E}">
-        <p14:creationId xmlns:p14="http://schemas.microsoft.com/office/powerpoint/2010/main" val="1620772595"/>
-      </p:ext>
-    </p:extLst>
-  </p:cSld>
-  <p:clrMapOvr>
-    <a:masterClrMapping/>
-  </p:clrMapOvr>
-</p:sld>
-</file>
-
-<file path=ppt/slides/slide22.xml><?xml version="1.0" encoding="utf-8"?>
-<p:sld xmlns:a="http://schemas.openxmlformats.org/drawingml/2006/main" xmlns:r="http://schemas.openxmlformats.org/officeDocument/2006/relationships" xmlns:p="http://schemas.openxmlformats.org/presentationml/2006/main">
-  <p:cSld>
-    <p:bg>
-      <p:bgPr>
-        <a:solidFill>
-          <a:schemeClr val="tx2"/>
-        </a:solidFill>
-        <a:effectLst/>
-      </p:bgPr>
-    </p:bg>
-    <p:spTree>
-      <p:nvGrpSpPr>
-        <p:cNvPr id="1" name="">
-          <a:extLst>
-            <a:ext uri="{FF2B5EF4-FFF2-40B4-BE49-F238E27FC236}">
-              <a16:creationId xmlns:a16="http://schemas.microsoft.com/office/drawing/2014/main" id="{726356F5-4BDD-3B48-6575-4A1B5EB6FF3E}"/>
-            </a:ext>
-          </a:extLst>
-        </p:cNvPr>
-        <p:cNvGrpSpPr/>
-        <p:nvPr/>
-      </p:nvGrpSpPr>
-      <p:grpSpPr>
-        <a:xfrm>
-          <a:off x="0" y="0"/>
-          <a:ext cx="0" cy="0"/>
-          <a:chOff x="0" y="0"/>
-          <a:chExt cx="0" cy="0"/>
-        </a:xfrm>
-      </p:grpSpPr>
-      <p:sp>
-        <p:nvSpPr>
-          <p:cNvPr id="6" name="Titre 1">
-            <a:extLst>
-              <a:ext uri="{FF2B5EF4-FFF2-40B4-BE49-F238E27FC236}">
-                <a16:creationId xmlns:a16="http://schemas.microsoft.com/office/drawing/2014/main" id="{912C43B0-C671-6AF9-C2AA-E925BF516034}"/>
-              </a:ext>
-            </a:extLst>
-          </p:cNvPr>
-          <p:cNvSpPr>
-            <a:spLocks noGrp="1"/>
-          </p:cNvSpPr>
-          <p:nvPr>
-            <p:ph type="title"/>
-          </p:nvPr>
-        </p:nvSpPr>
-        <p:spPr>
-          <a:xfrm>
-            <a:off x="4136719" y="448098"/>
-            <a:ext cx="3918562" cy="778698"/>
-          </a:xfrm>
-        </p:spPr>
-        <p:txBody>
-          <a:bodyPr anchor="ctr">
-            <a:normAutofit/>
-          </a:bodyPr>
-          <a:lstStyle/>
-          <a:p>
-            <a:r>
-              <a:rPr lang="fr-FR" sz="4000" dirty="0">
-                <a:solidFill>
-                  <a:schemeClr val="accent3"/>
-                </a:solidFill>
-              </a:rPr>
-              <a:t>démonstration</a:t>
-            </a:r>
-          </a:p>
-        </p:txBody>
-      </p:sp>
-      <p:pic>
-        <p:nvPicPr>
-          <p:cNvPr id="5" name="Image 4" descr="Une image contenant capture d’écran, texte, Logiciel multimédia, Logiciel de graphisme&#10;&#10;Le contenu généré par l’IA peut être incorrect.">
-            <a:extLst>
-              <a:ext uri="{FF2B5EF4-FFF2-40B4-BE49-F238E27FC236}">
-                <a16:creationId xmlns:a16="http://schemas.microsoft.com/office/drawing/2014/main" id="{A6A06992-A12B-7C6C-D2FC-8CBA327A0C22}"/>
-              </a:ext>
-            </a:extLst>
-          </p:cNvPr>
-          <p:cNvPicPr>
-            <a:picLocks noChangeAspect="1"/>
-          </p:cNvPicPr>
-          <p:nvPr/>
-        </p:nvPicPr>
-        <p:blipFill>
-          <a:blip r:embed="rId2">
-            <a:extLst>
-              <a:ext uri="{28A0092B-C50C-407E-A947-70E740481C1C}">
-                <a14:useLocalDpi xmlns:a14="http://schemas.microsoft.com/office/drawing/2010/main" val="0"/>
-              </a:ext>
-            </a:extLst>
-          </a:blip>
-          <a:stretch>
-            <a:fillRect/>
-          </a:stretch>
-        </p:blipFill>
-        <p:spPr>
-          <a:xfrm>
-            <a:off x="154507" y="1577147"/>
-            <a:ext cx="11882985" cy="4832755"/>
-          </a:xfrm>
-          <a:prstGeom prst="rect">
-            <a:avLst/>
-          </a:prstGeom>
-        </p:spPr>
-      </p:pic>
-    </p:spTree>
-    <p:extLst>
-      <p:ext uri="{BB962C8B-B14F-4D97-AF65-F5344CB8AC3E}">
-        <p14:creationId xmlns:p14="http://schemas.microsoft.com/office/powerpoint/2010/main" val="408065167"/>
-      </p:ext>
-    </p:extLst>
-  </p:cSld>
-  <p:clrMapOvr>
-    <a:masterClrMapping/>
-  </p:clrMapOvr>
-</p:sld>
-</file>
-
-<file path=ppt/slides/slide23.xml><?xml version="1.0" encoding="utf-8"?>
-<p:sld xmlns:a="http://schemas.openxmlformats.org/drawingml/2006/main" xmlns:r="http://schemas.openxmlformats.org/officeDocument/2006/relationships" xmlns:p="http://schemas.openxmlformats.org/presentationml/2006/main">
-  <p:cSld>
-    <p:bg>
-      <p:bgPr>
-        <a:solidFill>
-          <a:schemeClr val="tx2"/>
-        </a:solidFill>
-        <a:effectLst/>
-      </p:bgPr>
-    </p:bg>
-    <p:spTree>
-      <p:nvGrpSpPr>
-        <p:cNvPr id="1" name="">
-          <a:extLst>
-            <a:ext uri="{FF2B5EF4-FFF2-40B4-BE49-F238E27FC236}">
-              <a16:creationId xmlns:a16="http://schemas.microsoft.com/office/drawing/2014/main" id="{CC70B5C0-654E-1489-3F0B-005100AEC2F9}"/>
-            </a:ext>
-          </a:extLst>
-        </p:cNvPr>
-        <p:cNvGrpSpPr/>
-        <p:nvPr/>
-      </p:nvGrpSpPr>
-      <p:grpSpPr>
-        <a:xfrm>
-          <a:off x="0" y="0"/>
-          <a:ext cx="0" cy="0"/>
-          <a:chOff x="0" y="0"/>
-          <a:chExt cx="0" cy="0"/>
-        </a:xfrm>
-      </p:grpSpPr>
-      <p:sp>
-        <p:nvSpPr>
-          <p:cNvPr id="6" name="Titre 1">
-            <a:extLst>
-              <a:ext uri="{FF2B5EF4-FFF2-40B4-BE49-F238E27FC236}">
-                <a16:creationId xmlns:a16="http://schemas.microsoft.com/office/drawing/2014/main" id="{F3EA4129-830E-7D2B-433D-7AE3C1892F9D}"/>
-              </a:ext>
-            </a:extLst>
-          </p:cNvPr>
-          <p:cNvSpPr>
-            <a:spLocks noGrp="1"/>
-          </p:cNvSpPr>
-          <p:nvPr>
-            <p:ph type="title"/>
-          </p:nvPr>
-        </p:nvSpPr>
-        <p:spPr>
-          <a:xfrm>
-            <a:off x="4136719" y="448098"/>
-            <a:ext cx="3918562" cy="778698"/>
-          </a:xfrm>
-        </p:spPr>
-        <p:txBody>
-          <a:bodyPr anchor="ctr">
-            <a:normAutofit/>
-          </a:bodyPr>
-          <a:lstStyle/>
-          <a:p>
-            <a:r>
-              <a:rPr lang="fr-FR" sz="4000" dirty="0">
-                <a:solidFill>
-                  <a:schemeClr val="accent3"/>
-                </a:solidFill>
-              </a:rPr>
-              <a:t>démonstration</a:t>
-            </a:r>
-          </a:p>
-        </p:txBody>
-      </p:sp>
-      <p:pic>
-        <p:nvPicPr>
-          <p:cNvPr id="3" name="Image 2" descr="Une image contenant texte, capture d’écran, Logiciel multimédia, Logiciel de graphisme&#10;&#10;Le contenu généré par l’IA peut être incorrect.">
-            <a:extLst>
-              <a:ext uri="{FF2B5EF4-FFF2-40B4-BE49-F238E27FC236}">
-                <a16:creationId xmlns:a16="http://schemas.microsoft.com/office/drawing/2014/main" id="{D6561BD4-29E5-7026-FAFA-10598F91E5E0}"/>
-              </a:ext>
-            </a:extLst>
-          </p:cNvPr>
-          <p:cNvPicPr>
-            <a:picLocks noChangeAspect="1"/>
-          </p:cNvPicPr>
-          <p:nvPr/>
-        </p:nvPicPr>
-        <p:blipFill>
-          <a:blip r:embed="rId2">
-            <a:extLst>
-              <a:ext uri="{28A0092B-C50C-407E-A947-70E740481C1C}">
-                <a14:useLocalDpi xmlns:a14="http://schemas.microsoft.com/office/drawing/2010/main" val="0"/>
-              </a:ext>
-            </a:extLst>
-          </a:blip>
-          <a:stretch>
-            <a:fillRect/>
-          </a:stretch>
-        </p:blipFill>
-        <p:spPr>
-          <a:xfrm>
-            <a:off x="69788" y="1390440"/>
-            <a:ext cx="12052423" cy="5099070"/>
-          </a:xfrm>
-          <a:prstGeom prst="rect">
-            <a:avLst/>
-          </a:prstGeom>
-        </p:spPr>
-      </p:pic>
-    </p:spTree>
-    <p:extLst>
-      <p:ext uri="{BB962C8B-B14F-4D97-AF65-F5344CB8AC3E}">
-        <p14:creationId xmlns:p14="http://schemas.microsoft.com/office/powerpoint/2010/main" val="1013211684"/>
-      </p:ext>
-    </p:extLst>
-  </p:cSld>
-  <p:clrMapOvr>
-    <a:masterClrMapping/>
-  </p:clrMapOvr>
-</p:sld>
-</file>
-
-<file path=ppt/slides/slide24.xml><?xml version="1.0" encoding="utf-8"?>
-<p:sld xmlns:a="http://schemas.openxmlformats.org/drawingml/2006/main" xmlns:r="http://schemas.openxmlformats.org/officeDocument/2006/relationships" xmlns:p="http://schemas.openxmlformats.org/presentationml/2006/main">
-  <p:cSld>
-    <p:bg>
-      <p:bgPr>
-        <a:solidFill>
-          <a:schemeClr val="tx2"/>
-        </a:solidFill>
-        <a:effectLst/>
-      </p:bgPr>
-    </p:bg>
-    <p:spTree>
-      <p:nvGrpSpPr>
-        <p:cNvPr id="1" name="">
-          <a:extLst>
-            <a:ext uri="{FF2B5EF4-FFF2-40B4-BE49-F238E27FC236}">
-              <a16:creationId xmlns:a16="http://schemas.microsoft.com/office/drawing/2014/main" id="{632E18E2-6FBE-D260-C209-84E5A9C6B914}"/>
-            </a:ext>
-          </a:extLst>
-        </p:cNvPr>
-        <p:cNvGrpSpPr/>
-        <p:nvPr/>
-      </p:nvGrpSpPr>
-      <p:grpSpPr>
-        <a:xfrm>
-          <a:off x="0" y="0"/>
-          <a:ext cx="0" cy="0"/>
-          <a:chOff x="0" y="0"/>
-          <a:chExt cx="0" cy="0"/>
-        </a:xfrm>
-      </p:grpSpPr>
-      <p:sp>
-        <p:nvSpPr>
-          <p:cNvPr id="6" name="Titre 1">
-            <a:extLst>
-              <a:ext uri="{FF2B5EF4-FFF2-40B4-BE49-F238E27FC236}">
-                <a16:creationId xmlns:a16="http://schemas.microsoft.com/office/drawing/2014/main" id="{006CF8FE-7BBF-A908-D181-49C8750B8442}"/>
-              </a:ext>
-            </a:extLst>
-          </p:cNvPr>
-          <p:cNvSpPr>
-            <a:spLocks noGrp="1"/>
-          </p:cNvSpPr>
-          <p:nvPr>
-            <p:ph type="title"/>
-          </p:nvPr>
-        </p:nvSpPr>
-        <p:spPr>
-          <a:xfrm>
-            <a:off x="4598434" y="-175342"/>
-            <a:ext cx="3538320" cy="778698"/>
-          </a:xfrm>
-        </p:spPr>
-        <p:txBody>
-          <a:bodyPr anchor="ctr">
-            <a:normAutofit/>
-          </a:bodyPr>
-          <a:lstStyle/>
-          <a:p>
-            <a:r>
-              <a:rPr lang="fr-FR" sz="4000" dirty="0">
-                <a:solidFill>
-                  <a:schemeClr val="accent3"/>
-                </a:solidFill>
-              </a:rPr>
-              <a:t>CONCLUSION</a:t>
-            </a:r>
-          </a:p>
-        </p:txBody>
-      </p:sp>
-      <p:pic>
-        <p:nvPicPr>
-          <p:cNvPr id="5" name="Image 4" descr="Une image contenant texte, capture d’écran, menu, Police&#10;&#10;Le contenu généré par l’IA peut être incorrect.">
-            <a:extLst>
-              <a:ext uri="{FF2B5EF4-FFF2-40B4-BE49-F238E27FC236}">
-                <a16:creationId xmlns:a16="http://schemas.microsoft.com/office/drawing/2014/main" id="{E68B4950-F20D-51A8-44E1-F85C6B3E203C}"/>
-              </a:ext>
-            </a:extLst>
-          </p:cNvPr>
-          <p:cNvPicPr>
-            <a:picLocks noChangeAspect="1"/>
-          </p:cNvPicPr>
-          <p:nvPr/>
-        </p:nvPicPr>
-        <p:blipFill>
-          <a:blip r:embed="rId2">
-            <a:extLst>
-              <a:ext uri="{28A0092B-C50C-407E-A947-70E740481C1C}">
-                <a14:useLocalDpi xmlns:a14="http://schemas.microsoft.com/office/drawing/2010/main" val="0"/>
-              </a:ext>
-            </a:extLst>
-          </a:blip>
-          <a:stretch>
-            <a:fillRect/>
-          </a:stretch>
-        </p:blipFill>
-        <p:spPr>
-          <a:xfrm>
-            <a:off x="890516" y="723703"/>
-            <a:ext cx="10410967" cy="5769864"/>
-          </a:xfrm>
-          <a:prstGeom prst="rect">
-            <a:avLst/>
-          </a:prstGeom>
-        </p:spPr>
-      </p:pic>
-    </p:spTree>
-    <p:extLst>
-      <p:ext uri="{BB962C8B-B14F-4D97-AF65-F5344CB8AC3E}">
-        <p14:creationId xmlns:p14="http://schemas.microsoft.com/office/powerpoint/2010/main" val="3284045669"/>
-      </p:ext>
-    </p:extLst>
-  </p:cSld>
-  <p:clrMapOvr>
-    <a:masterClrMapping/>
-  </p:clrMapOvr>
-</p:sld>
-</file>
-
-<file path=ppt/slides/slide25.xml><?xml version="1.0" encoding="utf-8"?>
-<p:sld xmlns:a="http://schemas.openxmlformats.org/drawingml/2006/main" xmlns:r="http://schemas.openxmlformats.org/officeDocument/2006/relationships" xmlns:p="http://schemas.openxmlformats.org/presentationml/2006/main">
-  <p:cSld>
-    <p:bg>
-      <p:bgPr>
-        <a:solidFill>
-          <a:schemeClr val="bg1"/>
-        </a:solidFill>
-        <a:effectLst/>
-      </p:bgPr>
-    </p:bg>
-    <p:spTree>
-      <p:nvGrpSpPr>
-        <p:cNvPr id="1" name="">
-          <a:extLst>
-            <a:ext uri="{FF2B5EF4-FFF2-40B4-BE49-F238E27FC236}">
-              <a16:creationId xmlns:a16="http://schemas.microsoft.com/office/drawing/2014/main" id="{1C68715D-A2B5-DCF4-CF6C-A9FB950062D9}"/>
-            </a:ext>
-          </a:extLst>
-        </p:cNvPr>
-        <p:cNvGrpSpPr/>
-        <p:nvPr/>
-      </p:nvGrpSpPr>
-      <p:grpSpPr>
-        <a:xfrm>
-          <a:off x="0" y="0"/>
-          <a:ext cx="0" cy="0"/>
-          <a:chOff x="0" y="0"/>
-          <a:chExt cx="0" cy="0"/>
-        </a:xfrm>
-      </p:grpSpPr>
-      <p:pic>
-        <p:nvPicPr>
-          <p:cNvPr id="16" name="Picture 3" descr="Une image contenant rideau, capture d’écran, art, léger&#10;&#10;Description générée automatiquement">
-            <a:extLst>
-              <a:ext uri="{FF2B5EF4-FFF2-40B4-BE49-F238E27FC236}">
-                <a16:creationId xmlns:a16="http://schemas.microsoft.com/office/drawing/2014/main" id="{E032A3CE-58AD-B19A-7A0B-E8E4C69AE7F0}"/>
-              </a:ext>
-            </a:extLst>
-          </p:cNvPr>
-          <p:cNvPicPr>
-            <a:picLocks noChangeAspect="1"/>
-          </p:cNvPicPr>
-          <p:nvPr/>
-        </p:nvPicPr>
-        <p:blipFill>
-          <a:blip r:embed="rId2"/>
-          <a:srcRect b="19929"/>
-          <a:stretch/>
-        </p:blipFill>
-        <p:spPr>
-          <a:xfrm>
-            <a:off x="1" y="0"/>
-            <a:ext cx="12191999" cy="6857990"/>
-          </a:xfrm>
-          <a:prstGeom prst="rect">
-            <a:avLst/>
-          </a:prstGeom>
-        </p:spPr>
-      </p:pic>
-      <p:sp>
-        <p:nvSpPr>
-          <p:cNvPr id="36" name="Rectangle 35">
-            <a:extLst>
-              <a:ext uri="{FF2B5EF4-FFF2-40B4-BE49-F238E27FC236}">
-                <a16:creationId xmlns:a16="http://schemas.microsoft.com/office/drawing/2014/main" id="{007891EC-4501-44ED-A8C8-B11B6DB767AB}"/>
-              </a:ext>
-              <a:ext uri="{C183D7F6-B498-43B3-948B-1728B52AA6E4}">
-                <adec:decorative xmlns:adec="http://schemas.microsoft.com/office/drawing/2017/decorative" val="1"/>
-              </a:ext>
-            </a:extLst>
-          </p:cNvPr>
-          <p:cNvSpPr>
-            <a:spLocks noGrp="1" noRot="1" noChangeAspect="1" noMove="1" noResize="1" noEditPoints="1" noAdjustHandles="1" noChangeArrowheads="1" noChangeShapeType="1" noTextEdit="1"/>
-          </p:cNvSpPr>
-          <p:nvPr>
-            <p:extLst>
-              <p:ext uri="{386F3935-93C4-4BCD-93E2-E3B085C9AB24}">
-                <p16:designElem xmlns:p16="http://schemas.microsoft.com/office/powerpoint/2015/main" val="1"/>
-              </p:ext>
-            </p:extLst>
-          </p:nvPr>
-        </p:nvSpPr>
-        <p:spPr>
-          <a:xfrm>
-            <a:off x="0" y="2207602"/>
-            <a:ext cx="12191999" cy="3162146"/>
-          </a:xfrm>
-          <a:prstGeom prst="rect">
-            <a:avLst/>
-          </a:prstGeom>
-          <a:gradFill flip="none" rotWithShape="1">
-            <a:gsLst>
-              <a:gs pos="0">
-                <a:schemeClr val="tx2">
-                  <a:alpha val="0"/>
-                </a:schemeClr>
-              </a:gs>
-              <a:gs pos="50000">
-                <a:schemeClr val="tx2">
-                  <a:alpha val="35000"/>
-                </a:schemeClr>
-              </a:gs>
-              <a:gs pos="100000">
-                <a:schemeClr val="tx2">
-                  <a:alpha val="0"/>
-                </a:schemeClr>
-              </a:gs>
-            </a:gsLst>
-            <a:lin ang="16200000" scaled="1"/>
-            <a:tileRect/>
-          </a:gradFill>
-          <a:ln>
-            <a:noFill/>
-          </a:ln>
-        </p:spPr>
-        <p:style>
-          <a:lnRef idx="2">
-            <a:schemeClr val="accent1">
-              <a:shade val="50000"/>
-            </a:schemeClr>
-          </a:lnRef>
-          <a:fillRef idx="1">
-            <a:schemeClr val="accent1"/>
-          </a:fillRef>
-          <a:effectRef idx="0">
-            <a:schemeClr val="accent1"/>
-          </a:effectRef>
-          <a:fontRef idx="minor">
-            <a:schemeClr val="lt1"/>
-          </a:fontRef>
-        </p:style>
-        <p:txBody>
-          <a:bodyPr rtlCol="0" anchor="ctr"/>
-          <a:lstStyle/>
-          <a:p>
-            <a:pPr algn="ctr"/>
-            <a:endParaRPr lang="en-US"/>
-          </a:p>
-        </p:txBody>
-      </p:sp>
-      <p:sp>
-        <p:nvSpPr>
-          <p:cNvPr id="6" name="Titre 5">
-            <a:extLst>
-              <a:ext uri="{FF2B5EF4-FFF2-40B4-BE49-F238E27FC236}">
-                <a16:creationId xmlns:a16="http://schemas.microsoft.com/office/drawing/2014/main" id="{854E41FE-6390-1D23-C23A-BDB443340F02}"/>
-              </a:ext>
-            </a:extLst>
-          </p:cNvPr>
-          <p:cNvSpPr>
-            <a:spLocks noGrp="1"/>
-          </p:cNvSpPr>
-          <p:nvPr>
-            <p:ph type="ctrTitle"/>
-          </p:nvPr>
-        </p:nvSpPr>
-        <p:spPr>
-          <a:xfrm>
-            <a:off x="643466" y="643467"/>
-            <a:ext cx="10905059" cy="3330353"/>
-          </a:xfrm>
-          <a:effectLst>
-            <a:outerShdw blurRad="50800" dist="38100" dir="2700000" algn="tl" rotWithShape="0">
-              <a:prstClr val="black">
-                <a:alpha val="40000"/>
-              </a:prstClr>
-            </a:outerShdw>
-          </a:effectLst>
-        </p:spPr>
-        <p:txBody>
-          <a:bodyPr vert="horz" lIns="91440" tIns="45720" rIns="91440" bIns="45720" rtlCol="0">
-            <a:normAutofit/>
-          </a:bodyPr>
-          <a:lstStyle/>
-          <a:p>
-            <a:pPr algn="ctr"/>
-            <a:r>
-              <a:rPr lang="en-US" dirty="0">
-                <a:solidFill>
-                  <a:schemeClr val="bg1"/>
-                </a:solidFill>
-              </a:rPr>
-              <a:t>Merci de </a:t>
-            </a:r>
-            <a:r>
-              <a:rPr lang="en-US" dirty="0" err="1">
-                <a:solidFill>
-                  <a:schemeClr val="bg1"/>
-                </a:solidFill>
-              </a:rPr>
-              <a:t>votre</a:t>
-            </a:r>
-            <a:r>
-              <a:rPr lang="en-US" dirty="0">
-                <a:solidFill>
-                  <a:schemeClr val="bg1"/>
-                </a:solidFill>
-              </a:rPr>
-              <a:t> </a:t>
-            </a:r>
-            <a:r>
-              <a:rPr lang="en-US" dirty="0" err="1">
-                <a:solidFill>
-                  <a:schemeClr val="bg1"/>
-                </a:solidFill>
-              </a:rPr>
-              <a:t>ecoute</a:t>
-            </a:r>
-            <a:endParaRPr lang="en-US" dirty="0">
-              <a:solidFill>
-                <a:schemeClr val="bg1"/>
-              </a:solidFill>
-            </a:endParaRPr>
-          </a:p>
-          <a:p>
-            <a:pPr algn="ctr"/>
-            <a:br>
-              <a:rPr lang="en-US" dirty="0">
-                <a:solidFill>
-                  <a:schemeClr val="bg1"/>
-                </a:solidFill>
-              </a:rPr>
-            </a:br>
-            <a:endParaRPr lang="en-US" dirty="0">
-              <a:solidFill>
-                <a:schemeClr val="bg1"/>
-              </a:solidFill>
-            </a:endParaRPr>
-          </a:p>
-        </p:txBody>
-      </p:sp>
-      <p:sp>
-        <p:nvSpPr>
-          <p:cNvPr id="3" name="Sous-titre 2">
-            <a:extLst>
-              <a:ext uri="{FF2B5EF4-FFF2-40B4-BE49-F238E27FC236}">
-                <a16:creationId xmlns:a16="http://schemas.microsoft.com/office/drawing/2014/main" id="{8294FA5C-C2C6-18D9-1036-09AC0B46704B}"/>
-              </a:ext>
-            </a:extLst>
-          </p:cNvPr>
-          <p:cNvSpPr>
-            <a:spLocks noGrp="1"/>
-          </p:cNvSpPr>
-          <p:nvPr>
-            <p:ph type="subTitle" idx="1"/>
-          </p:nvPr>
-        </p:nvSpPr>
-        <p:spPr>
-          <a:xfrm>
-            <a:off x="643466" y="4133135"/>
-            <a:ext cx="10902016" cy="1454510"/>
-          </a:xfrm>
-          <a:effectLst>
-            <a:outerShdw blurRad="50800" dist="38100" dir="2700000" algn="tl" rotWithShape="0">
-              <a:prstClr val="black">
-                <a:alpha val="40000"/>
-              </a:prstClr>
-            </a:outerShdw>
-          </a:effectLst>
-        </p:spPr>
-        <p:txBody>
-          <a:bodyPr vert="horz" lIns="91440" tIns="45720" rIns="91440" bIns="45720" rtlCol="0">
-            <a:normAutofit/>
-          </a:bodyPr>
-          <a:lstStyle/>
-          <a:p>
-            <a:pPr algn="ctr"/>
-            <a:r>
-              <a:rPr lang="en-US" sz="1800" b="1" dirty="0" err="1">
-                <a:solidFill>
-                  <a:schemeClr val="bg1"/>
-                </a:solidFill>
-                <a:effectLst/>
-              </a:rPr>
-              <a:t>Projet</a:t>
-            </a:r>
-            <a:r>
-              <a:rPr lang="en-US" sz="1800" b="1" dirty="0">
-                <a:solidFill>
-                  <a:schemeClr val="bg1"/>
-                </a:solidFill>
-                <a:effectLst/>
-              </a:rPr>
-              <a:t> 9</a:t>
-            </a:r>
-            <a:br>
-              <a:rPr lang="en-US" sz="1800" b="1" i="0" dirty="0">
-                <a:solidFill>
-                  <a:schemeClr val="bg1"/>
-                </a:solidFill>
-                <a:effectLst/>
-              </a:rPr>
-            </a:br>
-            <a:endParaRPr lang="en-US" sz="1800" b="1" dirty="0">
-              <a:solidFill>
-                <a:schemeClr val="bg1"/>
-              </a:solidFill>
-            </a:endParaRPr>
-          </a:p>
-        </p:txBody>
-      </p:sp>
-      <p:cxnSp>
-        <p:nvCxnSpPr>
-          <p:cNvPr id="38" name="Straight Connector 37">
-            <a:extLst>
-              <a:ext uri="{FF2B5EF4-FFF2-40B4-BE49-F238E27FC236}">
-                <a16:creationId xmlns:a16="http://schemas.microsoft.com/office/drawing/2014/main" id="{34E5597F-CE67-4085-9548-E6A8036DA3BB}"/>
-              </a:ext>
-              <a:ext uri="{C183D7F6-B498-43B3-948B-1728B52AA6E4}">
-                <adec:decorative xmlns:adec="http://schemas.microsoft.com/office/drawing/2017/decorative" val="1"/>
-              </a:ext>
-            </a:extLst>
-          </p:cNvPr>
-          <p:cNvCxnSpPr>
-            <a:cxnSpLocks noGrp="1" noRot="1" noChangeAspect="1" noMove="1" noResize="1" noEditPoints="1" noAdjustHandles="1" noChangeArrowheads="1" noChangeShapeType="1"/>
-          </p:cNvCxnSpPr>
-          <p:nvPr>
-            <p:extLst>
-              <p:ext uri="{386F3935-93C4-4BCD-93E2-E3B085C9AB24}">
-                <p16:designElem xmlns:p16="http://schemas.microsoft.com/office/powerpoint/2015/main" val="1"/>
-              </p:ext>
-            </p:extLst>
-          </p:nvPr>
-        </p:nvCxnSpPr>
-        <p:spPr>
-          <a:xfrm>
-            <a:off x="3393881" y="4035362"/>
-            <a:ext cx="5404237" cy="0"/>
-          </a:xfrm>
-          <a:prstGeom prst="line">
-            <a:avLst/>
-          </a:prstGeom>
-          <a:ln>
-            <a:solidFill>
-              <a:schemeClr val="bg1"/>
-            </a:solidFill>
-          </a:ln>
-          <a:effectLst>
-            <a:outerShdw blurRad="50800" dist="38100" dir="2700000" algn="tl" rotWithShape="0">
-              <a:prstClr val="black">
-                <a:alpha val="40000"/>
-              </a:prstClr>
-            </a:outerShdw>
-          </a:effectLst>
-        </p:spPr>
-        <p:style>
-          <a:lnRef idx="1">
-            <a:schemeClr val="accent1"/>
-          </a:lnRef>
-          <a:fillRef idx="0">
-            <a:schemeClr val="accent1"/>
-          </a:fillRef>
-          <a:effectRef idx="0">
-            <a:schemeClr val="accent1"/>
-          </a:effectRef>
-          <a:fontRef idx="minor">
-            <a:schemeClr val="tx1"/>
-          </a:fontRef>
-        </p:style>
-      </p:cxnSp>
-    </p:spTree>
-    <p:extLst>
-      <p:ext uri="{BB962C8B-B14F-4D97-AF65-F5344CB8AC3E}">
-        <p14:creationId xmlns:p14="http://schemas.microsoft.com/office/powerpoint/2010/main" val="3170525015"/>
-      </p:ext>
-    </p:extLst>
-  </p:cSld>
-  <p:clrMapOvr>
-    <a:masterClrMapping/>
   </p:clrMapOvr>
 </p:sld>
 </file>
